--- a/protected-downloads/praesentation/TL07.pptx
+++ b/protected-downloads/praesentation/TL07.pptx
@@ -5011,7 +5011,7 @@
                 </a:solidFill>
                 <a:latin typeface="Arial"/>
               </a:rPr>
-              <a:t>v0.2</a:t>
+              <a:t>v1.0</a:t>
             </a:r>
           </a:p>
         </p:txBody>

--- a/protected-downloads/praesentation/TL07.pptx
+++ b/protected-downloads/praesentation/TL07.pptx
@@ -596,17 +596,22 @@
           <a:lstStyle/>
           <a:p>
             <a:r>
-              <a:t>Aktivierungsfrage: 'Welche Frage aus dieser Tabelle würde Ihnen im echten Gespräch am schwersten fallen – und warum?'</a:t>
-            </a:r>
-          </a:p>
-          <a:p>
-            <a:r>
-              <a:t>Rogers &amp; Farson (1957): Aktives Zuhören heißt nicht auf die eigene nächste Aussage warten – sondern auf die nächste Frage hören, die den Berater tiefer führt.</a:t>
-            </a:r>
-          </a:p>
-          <a:p>
-            <a:r>
-              <a:t>Zusammenfassen ohne Bewerten demonstrieren: 'Wenn ich dich richtig verstehe, siehst du das Problem in der fehlenden Verbindlichkeit des Kunden – nicht im Produkt. Stimmt das?'</a:t>
+              <a:t>Zwischenerinnerung nach 12 Min.: 'Prüfen Sie in A3: Ist Ihre alternative Frage kürzer und offener als das Original – oder sind es drei Fragen in einer?'</a:t>
+            </a:r>
+          </a:p>
+          <a:p>
+            <a:r>
+              <a:t>Kollegiale Fallberatung (125–155 Min.) in 3–4er-Gruppen: Fall vorstellen → Schlüsselfrage → Perspektivwechsel Berater-Sicht → Coaching-Fragen vorschlagen → Klärung → konkreter nächster Schritt.</a:t>
+            </a:r>
+          </a:p>
+          <a:p>
+            <a:r>
+              <a:t>G-Phase im Plenum vorstellen lassen: Moderationsfrage 'Hören Sie das als der Berater – fühlen Sie sich gefragt oder verhört?'</a:t>
+            </a:r>
+          </a:p>
+          <a:p>
+            <a:r>
+              <a:t>Kein Rollenspiel – Textprüfung und Gesprächsvorbereitung.</a:t>
             </a:r>
           </a:p>
         </p:txBody>
@@ -676,22 +681,22 @@
           <a:lstStyle/>
           <a:p>
             <a:r>
-              <a:t>Zwischenerinnerung nach 12 Min.: 'Prüfen Sie in A3: Ist Ihre alternative Frage kürzer und offener als das Original – oder sind es drei Fragen in einer?'</a:t>
-            </a:r>
-          </a:p>
-          <a:p>
-            <a:r>
-              <a:t>Kollegiale Fallberatung (125–155 Min.) in 3–4er-Gruppen: Fall vorstellen → Schlüsselfrage → Perspektivwechsel Berater-Sicht → Coaching-Fragen vorschlagen → Klärung → konkreter nächster Schritt.</a:t>
-            </a:r>
-          </a:p>
-          <a:p>
-            <a:r>
-              <a:t>G-Phase im Plenum vorstellen lassen: Moderationsfrage 'Hören Sie das als der Berater – fühlen Sie sich gefragt oder verhört?'</a:t>
-            </a:r>
-          </a:p>
-          <a:p>
-            <a:r>
-              <a:t>Kein Rollenspiel – Textprüfung und Gesprächsvorbereitung.</a:t>
+              <a:t>Zwischenerinnerung nach 15 Min.: 'Schritt 4 ist Freitext – denken Sie nicht in Programmen, sondern in konkreten Situationen.'</a:t>
+            </a:r>
+          </a:p>
+          <a:p>
+            <a:r>
+              <a:t>Qualitätskriterium sichtbar machen: 'Ich werde mehr coachen' ist kein Konzept. 'In der nächsten Teamrunde stelle ich bei der ersten Berater-Frage eine Gegenfrage' ist ein Konzept.</a:t>
+            </a:r>
+          </a:p>
+          <a:p>
+            <a:r>
+              <a:t>Fragen-Werkstatt (210–225 Min.): Je zwei TN lesen sich G-Frage vor – drei Analysekriterien: (1) Wie viele Fragezeichen? (2) Suggestiv? (3) Kurz genug für eine echte Frage? Dann 5 Min. stille Überarbeitung.</a:t>
+            </a:r>
+          </a:p>
+          <a:p>
+            <a:r>
+              <a:t>Plenum-Auswertung: Nur zweite Version vorstellen – macht Lernfortschritt im Raum sichtbar.</a:t>
             </a:r>
           </a:p>
         </p:txBody>
@@ -761,22 +766,17 @@
           <a:lstStyle/>
           <a:p>
             <a:r>
-              <a:t>Zwischenerinnerung nach 15 Min.: 'Schritt 4 ist Freitext – denken Sie nicht in Programmen, sondern in konkreten Situationen.'</a:t>
-            </a:r>
-          </a:p>
-          <a:p>
-            <a:r>
-              <a:t>Qualitätskriterium sichtbar machen: 'Ich werde mehr coachen' ist kein Konzept. 'In der nächsten Teamrunde stelle ich bei der ersten Berater-Frage eine Gegenfrage' ist ein Konzept.</a:t>
-            </a:r>
-          </a:p>
-          <a:p>
-            <a:r>
-              <a:t>Fragen-Werkstatt (210–225 Min.): Je zwei TN lesen sich G-Frage vor – drei Analysekriterien: (1) Wie viele Fragezeichen? (2) Suggestiv? (3) Kurz genug für eine echte Frage? Dann 5 Min. stille Überarbeitung.</a:t>
-            </a:r>
-          </a:p>
-          <a:p>
-            <a:r>
-              <a:t>Plenum-Auswertung: Nur zweite Version vorstellen – macht Lernfortschritt im Raum sichtbar.</a:t>
+              <a:t>Selbstcheck (Sec 5) in Stille ausfüllen (ca. 3 Min.): Welche Frage ist die unbequemste?</a:t>
+            </a:r>
+          </a:p>
+          <a:p>
+            <a:r>
+              <a:t>Plenumsfrage: 'Was nehme ich heute mit – eine konkrete GROW-Frage, die ich diese Woche einmal verwende, anstatt sofort zu antworten?' 2–3 TN antworten lassen.</a:t>
+            </a:r>
+          </a:p>
+          <a:p>
+            <a:r>
+              <a:t>Bewertungsschwelle ansprechen: 3+ bei mindestens drei Selbstcheck-Fragen → TL09 aufsetzen. 2 oder weniger bei zwei Fragen → echten Fall in die nächste TL-Runde mitbringen.</a:t>
             </a:r>
           </a:p>
         </p:txBody>
@@ -846,86 +846,6 @@
           <a:lstStyle/>
           <a:p>
             <a:r>
-              <a:t>Selbstcheck (Sec 5) in Stille ausfüllen (ca. 3 Min.): Welche Frage ist die unbequemste?</a:t>
-            </a:r>
-          </a:p>
-          <a:p>
-            <a:r>
-              <a:t>Plenumsfrage: 'Was nehme ich heute mit – eine konkrete GROW-Frage, die ich diese Woche einmal verwende, anstatt sofort zu antworten?' 2–3 TN antworten lassen.</a:t>
-            </a:r>
-          </a:p>
-          <a:p>
-            <a:r>
-              <a:t>Bewertungsschwelle ansprechen: 3+ bei mindestens drei Selbstcheck-Fragen → TL09 aufsetzen. 2 oder weniger bei zwei Fragen → echten Fall in die nächste TL-Runde mitbringen.</a:t>
-            </a:r>
-          </a:p>
-        </p:txBody>
-      </p:sp>
-      <p:sp>
-        <p:nvSpPr>
-          <p:cNvPr id="4" name="Slide Number Placeholder 3"/>
-          <p:cNvSpPr>
-            <a:spLocks noGrp="1"/>
-          </p:cNvSpPr>
-          <p:nvPr>
-            <p:ph type="sldNum" idx="5" sz="quarter"/>
-          </p:nvPr>
-        </p:nvSpPr>
-        <p:spPr/>
-      </p:sp>
-    </p:spTree>
-  </p:cSld>
-  <p:clrMapOvr>
-    <a:masterClrMapping/>
-  </p:clrMapOvr>
-</p:notes>
-</file>
-
-<file path=ppt/notesSlides/notesSlide14.xml><?xml version="1.0" encoding="utf-8"?>
-<p:notes xmlns:a="http://schemas.openxmlformats.org/drawingml/2006/main" xmlns:p="http://schemas.openxmlformats.org/presentationml/2006/main" xmlns:r="http://schemas.openxmlformats.org/officeDocument/2006/relationships">
-  <p:cSld>
-    <p:spTree>
-      <p:nvGrpSpPr>
-        <p:cNvPr id="1" name=""/>
-        <p:cNvGrpSpPr/>
-        <p:nvPr/>
-      </p:nvGrpSpPr>
-      <p:grpSpPr>
-        <a:xfrm>
-          <a:off x="0" y="0"/>
-          <a:ext cx="0" cy="0"/>
-          <a:chOff x="0" y="0"/>
-          <a:chExt cx="0" cy="0"/>
-        </a:xfrm>
-      </p:grpSpPr>
-      <p:sp>
-        <p:nvSpPr>
-          <p:cNvPr id="2" name="Slide Image Placeholder 1"/>
-          <p:cNvSpPr>
-            <a:spLocks noGrp="1"/>
-          </p:cNvSpPr>
-          <p:nvPr>
-            <p:ph type="sldImg" idx="2"/>
-          </p:nvPr>
-        </p:nvSpPr>
-        <p:spPr/>
-      </p:sp>
-      <p:sp>
-        <p:nvSpPr>
-          <p:cNvPr id="3" name="Notes Placeholder 2"/>
-          <p:cNvSpPr>
-            <a:spLocks noGrp="1"/>
-          </p:cNvSpPr>
-          <p:nvPr>
-            <p:ph type="body" idx="3" sz="quarter"/>
-          </p:nvPr>
-        </p:nvSpPr>
-        <p:spPr/>
-        <p:txBody>
-          <a:bodyPr/>
-          <a:lstStyle/>
-          <a:p>
-            <a:r>
               <a:t>Greenleaf-Test vorlesen: 'Jedes Mal, wenn Sie in der nächsten Woche einem Berater eine Antwort geben, fragen Sie sich: Hätte er die Antwort auch selbst entwickeln können? Wenn ja – wie lautet die Frage, die Sie stattdessen hätten stellen können?'</a:t>
             </a:r>
           </a:p>
@@ -1006,7 +926,17 @@
           <a:lstStyle/>
           <a:p>
             <a:r>
-              <a:t>Siehe Trainerhandbuch (Sektion 3) für Moderationshinweise, Timing und erwartete Teilnehmerreaktionen.</a:t>
+              <a:t>Blitzlicht-Runde aufgreifen (Flipchart, 0–15 Min.): Welche Situation beschäftigt Sie beim Thema Coaching vs. Anleiten gerade am meisten?</a:t>
+            </a:r>
+          </a:p>
+          <a:p>
+            <a:r>
+              <a:t>Explizit benennen: 'TL07 ist kein Gesprächsskript. Es ist eine Entscheidung, wie Sie Führung verstehen.'</a:t>
+            </a:r>
+          </a:p>
+          <a:p>
+            <a:r>
+              <a:t>Brücken-Merksatz für Flipchart: Die Frage ist nicht Wie führe ich das Gespräch – sondern Aus welcher Haltung heraus.'.</a:t>
             </a:r>
           </a:p>
         </p:txBody>
@@ -1076,17 +1006,17 @@
           <a:lstStyle/>
           <a:p>
             <a:r>
-              <a:t>Blitzlicht-Runde aufgreifen (Flipchart, 0–15 Min.): Welche Situation beschäftigt Sie beim Thema Coaching vs. Anleiten gerade am meisten?</a:t>
-            </a:r>
-          </a:p>
-          <a:p>
-            <a:r>
-              <a:t>Explizit benennen: 'TL07 ist kein Gesprächsskript. Es ist eine Entscheidung, wie Sie Führung verstehen.'</a:t>
-            </a:r>
-          </a:p>
-          <a:p>
-            <a:r>
-              <a:t>Brücken-Merksatz für Flipchart: Die Frage ist nicht Wie führe ich das Gespräch – sondern Aus welcher Haltung heraus.'.</a:t>
+              <a:t>Tabelle entwickeln – nicht aufdecken: TN benennen lassen, welcher Modus in ihrem Alltag dominiert.</a:t>
+            </a:r>
+          </a:p>
+          <a:p>
+            <a:r>
+              <a:t>Entlastungsbotschaft früh setzen: 'Die coachende Führungskraft wechselt zwischen den Modi – sie ist nicht permanent im Coaching-Modus.'</a:t>
+            </a:r>
+          </a:p>
+          <a:p>
+            <a:r>
+              <a:t>Aktivierungsfrage nach 20 Min.: 'In wie vielen der letzten Berater-Anfragen waren Sie im Coaching-Modus – und in wie vielen haben Sie die Lösung geliefert?'</a:t>
             </a:r>
           </a:p>
         </p:txBody>
@@ -1156,17 +1086,17 @@
           <a:lstStyle/>
           <a:p>
             <a:r>
-              <a:t>Tabelle entwickeln – nicht aufdecken: TN benennen lassen, welcher Modus in ihrem Alltag dominiert.</a:t>
-            </a:r>
-          </a:p>
-          <a:p>
-            <a:r>
-              <a:t>Entlastungsbotschaft früh setzen: 'Die coachende Führungskraft wechselt zwischen den Modi – sie ist nicht permanent im Coaching-Modus.'</a:t>
-            </a:r>
-          </a:p>
-          <a:p>
-            <a:r>
-              <a:t>Aktivierungsfrage nach 20 Min.: 'In wie vielen der letzten Berater-Anfragen waren Sie im Coaching-Modus – und in wie vielen haben Sie die Lösung geliefert?'</a:t>
+              <a:t>Befund Deci &amp; Ryan kurz verankern: Autonomieerleben als konstitutive Bedingung nachhaltiger Verhaltensveränderung – kein Soft Skill, sondern Motivationsforschung.</a:t>
+            </a:r>
+          </a:p>
+          <a:p>
+            <a:r>
+              <a:t>Greenleaf-Test vorlesen: 'Wachsen die Menschen, denen Sie führend begegnen – werden sie eigenverantwortlicher, kompetenter, freier?'</a:t>
+            </a:r>
+          </a:p>
+          <a:p>
+            <a:r>
+              <a:t>Genossenschaftliche Rahmung: § 1 GenG – Förderauftrag gilt nach innen wie nach außen.</a:t>
             </a:r>
           </a:p>
         </p:txBody>
@@ -1236,17 +1166,17 @@
           <a:lstStyle/>
           <a:p>
             <a:r>
-              <a:t>Befund Deci &amp; Ryan kurz verankern: Autonomieerleben als konstitutive Bedingung nachhaltiger Verhaltensveränderung – kein Soft Skill, sondern Motivationsforschung.</a:t>
-            </a:r>
-          </a:p>
-          <a:p>
-            <a:r>
-              <a:t>Greenleaf-Test vorlesen: 'Wachsen die Menschen, denen Sie führend begegnen – werden sie eigenverantwortlicher, kompetenter, freier?'</a:t>
-            </a:r>
-          </a:p>
-          <a:p>
-            <a:r>
-              <a:t>Genossenschaftliche Rahmung: § 1 GenG – Förderauftrag gilt nach innen wie nach außen.</a:t>
+              <a:t>Affen-Metapher aktiviert sofort: 'Wer von Ihnen trägt gerade die Affen mehrerer Berater?' – fast alle heben die Hand.</a:t>
+            </a:r>
+          </a:p>
+          <a:p>
+            <a:r>
+              <a:t>Einwand antizipieren: 'Coaching kostet Zeit' → Gegenrechnung: 'Was kostet dieselbe Antwort viermal?'</a:t>
+            </a:r>
+          </a:p>
+          <a:p>
+            <a:r>
+              <a:t>Formulierung für Flipchart: 'Die nächste Frage ist oft stärker als die nächste Antwort.'.</a:t>
             </a:r>
           </a:p>
         </p:txBody>
@@ -1316,17 +1246,17 @@
           <a:lstStyle/>
           <a:p>
             <a:r>
-              <a:t>Affen-Metapher aktiviert sofort: 'Wer von Ihnen trägt gerade die Affen mehrerer Berater?' – fast alle heben die Hand.</a:t>
-            </a:r>
-          </a:p>
-          <a:p>
-            <a:r>
-              <a:t>Einwand antizipieren: 'Coaching kostet Zeit' → Gegenrechnung: 'Was kostet dieselbe Antwort viermal?'</a:t>
-            </a:r>
-          </a:p>
-          <a:p>
-            <a:r>
-              <a:t>Formulierung für Flipchart: 'Die nächste Frage ist oft stärker als die nächste Antwort.'.</a:t>
+              <a:t>Tabelle ist Kern-Handwerkszeug – TN erhalten sie als Merkkarte.</a:t>
+            </a:r>
+          </a:p>
+          <a:p>
+            <a:r>
+              <a:t>Häufige Fehler einzeln besprechen lassen: 'Welcher Fehler liegt Ihnen am nächsten – Goal oder Options?'</a:t>
+            </a:r>
+          </a:p>
+          <a:p>
+            <a:r>
+              <a:t>Merksatz nach Tabelle: 'GROW ist Gerüst, kein Skript. Die Situation diktiert die nächste Frage, nicht das Schema.'.</a:t>
             </a:r>
           </a:p>
         </p:txBody>
@@ -1396,17 +1326,17 @@
           <a:lstStyle/>
           <a:p>
             <a:r>
-              <a:t>Tabelle ist Kern-Handwerkszeug – TN erhalten sie als Merkkarte.</a:t>
-            </a:r>
-          </a:p>
-          <a:p>
-            <a:r>
-              <a:t>Häufige Fehler einzeln besprechen lassen: 'Welcher Fehler liegt Ihnen am nächsten – Goal oder Options?'</a:t>
-            </a:r>
-          </a:p>
-          <a:p>
-            <a:r>
-              <a:t>Merksatz nach Tabelle: 'GROW ist Gerüst, kein Skript. Die Situation diktiert die nächste Frage, nicht das Schema.'.</a:t>
+              <a:t>Diese Matrix ist das wichtigste Orientierungsinstrument dieses Blocks – Glaubwürdigkeit entsteht durch die Fälle, in denen Coaching das falsche Instrument ist.</a:t>
+            </a:r>
+          </a:p>
+          <a:p>
+            <a:r>
+              <a:t>Compliance-Zeile betonen: 'Bei einem Compliance-Fehler braucht der Berater Klarheit über Konsequenzen – keine offene Frage.'</a:t>
+            </a:r>
+          </a:p>
+          <a:p>
+            <a:r>
+              <a:t>Voraussetzungsprüfung einführen: Kompetenz? Bereitschaft? Zeit? Alle drei Ja → GROW. Eines Nein → Modus wechseln.</a:t>
             </a:r>
           </a:p>
         </p:txBody>
@@ -1476,17 +1406,17 @@
           <a:lstStyle/>
           <a:p>
             <a:r>
-              <a:t>Diese Matrix ist das wichtigste Orientierungsinstrument dieses Blocks – Glaubwürdigkeit entsteht durch die Fälle, in denen Coaching das falsche Instrument ist.</a:t>
-            </a:r>
-          </a:p>
-          <a:p>
-            <a:r>
-              <a:t>Compliance-Zeile betonen: 'Bei einem Compliance-Fehler braucht der Berater Klarheit über Konsequenzen – keine offene Frage.'</a:t>
-            </a:r>
-          </a:p>
-          <a:p>
-            <a:r>
-              <a:t>Voraussetzungsprüfung einführen: Kompetenz? Bereitschaft? Zeit? Alle drei Ja → GROW. Eines Nein → Modus wechseln.</a:t>
+              <a:t>Gegenüberstellung so vorstellen, dass TN die Unterschiede selbst benennen: 'Was ist der Unterschied zwischen diesen beiden Fragen – was löst jede in Ihnen aus?'</a:t>
+            </a:r>
+          </a:p>
+          <a:p>
+            <a:r>
+              <a:t>Merkmale kraftvoller Fragen einführen: kurz, präzise, offen, im Dienst des Beraters – nicht drei Fragen in einer.</a:t>
+            </a:r>
+          </a:p>
+          <a:p>
+            <a:r>
+              <a:t>Stille explizit thematisieren: 'Coaching-Pausen sind keine Gesprächspausen – sie sind Denkzeiten.' Demonstrieren: 8–10 Sekunden Pause im Plenum.</a:t>
             </a:r>
           </a:p>
         </p:txBody>
@@ -1556,17 +1486,17 @@
           <a:lstStyle/>
           <a:p>
             <a:r>
-              <a:t>Gegenüberstellung so vorstellen, dass TN die Unterschiede selbst benennen: 'Was ist der Unterschied zwischen diesen beiden Fragen – was löst jede in Ihnen aus?'</a:t>
-            </a:r>
-          </a:p>
-          <a:p>
-            <a:r>
-              <a:t>Merkmale kraftvoller Fragen einführen: kurz, präzise, offen, im Dienst des Beraters – nicht drei Fragen in einer.</a:t>
-            </a:r>
-          </a:p>
-          <a:p>
-            <a:r>
-              <a:t>Stille explizit thematisieren: 'Coaching-Pausen sind keine Gesprächspausen – sie sind Denkzeiten.' Demonstrieren: 8–10 Sekunden Pause im Plenum.</a:t>
+              <a:t>Aktivierungsfrage: 'Welche Frage aus dieser Tabelle würde Ihnen im echten Gespräch am schwersten fallen – und warum?'</a:t>
+            </a:r>
+          </a:p>
+          <a:p>
+            <a:r>
+              <a:t>Rogers &amp; Farson (1957): Aktives Zuhören heißt nicht auf die eigene nächste Aussage warten – sondern auf die nächste Frage hören, die den Berater tiefer führt.</a:t>
+            </a:r>
+          </a:p>
+          <a:p>
+            <a:r>
+              <a:t>Zusammenfassen ohne Bewerten demonstrieren: 'Wenn ich dich richtig verstehe, siehst du das Problem in der fehlenden Verbindlichkeit des Kunden – nicht im Produkt. Stimmt das?'</a:t>
             </a:r>
           </a:p>
         </p:txBody>
@@ -12879,7 +12809,7 @@
             <a:avLst/>
           </a:prstGeom>
           <a:solidFill>
-            <a:srgbClr val="EDEDF3"/>
+            <a:srgbClr val="1F2C56"/>
           </a:solidFill>
           <a:ln>
             <a:noFill/>
@@ -12915,129 +12845,8 @@
         </p:nvSpPr>
         <p:spPr>
           <a:xfrm>
-            <a:off x="0" y="0"/>
-            <a:ext cx="12188952" cy="50292"/>
-          </a:xfrm>
-          <a:prstGeom prst="rect">
-            <a:avLst/>
-          </a:prstGeom>
-          <a:solidFill>
-            <a:srgbClr val="1F2C56"/>
-          </a:solidFill>
-          <a:ln>
-            <a:noFill/>
-          </a:ln>
-        </p:spPr>
-        <p:style>
-          <a:lnRef idx="1">
-            <a:schemeClr val="accent1"/>
-          </a:lnRef>
-          <a:fillRef idx="3">
-            <a:schemeClr val="accent1"/>
-          </a:fillRef>
-          <a:effectRef idx="2">
-            <a:schemeClr val="accent1"/>
-          </a:effectRef>
-          <a:fontRef idx="minor">
-            <a:schemeClr val="lt1"/>
-          </a:fontRef>
-        </p:style>
-        <p:txBody>
-          <a:bodyPr rtlCol="0" anchor="ctr"/>
-          <a:lstStyle/>
-          <a:p>
-            <a:pPr algn="ctr"/>
-          </a:p>
-        </p:txBody>
-      </p:sp>
-      <p:sp>
-        <p:nvSpPr>
-          <p:cNvPr id="4" name="TextBox 3"/>
-          <p:cNvSpPr txBox="1"/>
-          <p:nvPr/>
-        </p:nvSpPr>
-        <p:spPr>
-          <a:xfrm>
-            <a:off x="685800" y="109728"/>
-            <a:ext cx="10817352" cy="228600"/>
-          </a:xfrm>
-          <a:prstGeom prst="rect">
-            <a:avLst/>
-          </a:prstGeom>
-          <a:noFill/>
-        </p:spPr>
-        <p:txBody>
-          <a:bodyPr wrap="none">
-            <a:spAutoFit/>
-          </a:bodyPr>
-          <a:lstStyle/>
-          <a:p>
-            <a:pPr algn="l"/>
-            <a:r>
-              <a:rPr sz="750">
-                <a:solidFill>
-                  <a:srgbClr val="78808C"/>
-                </a:solidFill>
-                <a:latin typeface="Consolas"/>
-              </a:rPr>
-              <a:t>TL07  ·  INHALT</a:t>
-            </a:r>
-          </a:p>
-        </p:txBody>
-      </p:sp>
-      <p:sp>
-        <p:nvSpPr>
-          <p:cNvPr id="5" name="Rectangle 4"/>
-          <p:cNvSpPr/>
-          <p:nvPr/>
-        </p:nvSpPr>
-        <p:spPr>
-          <a:xfrm>
-            <a:off x="0" y="1234440"/>
-            <a:ext cx="12188952" cy="12700"/>
-          </a:xfrm>
-          <a:prstGeom prst="rect">
-            <a:avLst/>
-          </a:prstGeom>
-          <a:solidFill>
-            <a:srgbClr val="D8DFE4"/>
-          </a:solidFill>
-          <a:ln>
-            <a:noFill/>
-          </a:ln>
-        </p:spPr>
-        <p:style>
-          <a:lnRef idx="1">
-            <a:schemeClr val="accent1"/>
-          </a:lnRef>
-          <a:fillRef idx="3">
-            <a:schemeClr val="accent1"/>
-          </a:fillRef>
-          <a:effectRef idx="2">
-            <a:schemeClr val="accent1"/>
-          </a:effectRef>
-          <a:fontRef idx="minor">
-            <a:schemeClr val="lt1"/>
-          </a:fontRef>
-        </p:style>
-        <p:txBody>
-          <a:bodyPr rtlCol="0" anchor="ctr"/>
-          <a:lstStyle/>
-          <a:p>
-            <a:pPr algn="ctr"/>
-          </a:p>
-        </p:txBody>
-      </p:sp>
-      <p:sp>
-        <p:nvSpPr>
-          <p:cNvPr id="6" name="Rectangle 5"/>
-          <p:cNvSpPr/>
-          <p:nvPr/>
-        </p:nvSpPr>
-        <p:spPr>
-          <a:xfrm>
-            <a:off x="685800" y="502920"/>
-            <a:ext cx="36576" cy="658368"/>
+            <a:off x="685800" y="2788920"/>
+            <a:ext cx="548640" cy="38100"/>
           </a:xfrm>
           <a:prstGeom prst="rect">
             <a:avLst/>
@@ -13073,14 +12882,14 @@
       </p:sp>
       <p:sp>
         <p:nvSpPr>
-          <p:cNvPr id="7" name="TextBox 6"/>
+          <p:cNvPr id="4" name="TextBox 3"/>
           <p:cNvSpPr txBox="1"/>
           <p:nvPr/>
         </p:nvSpPr>
         <p:spPr>
           <a:xfrm>
-            <a:off x="813816" y="502920"/>
-            <a:ext cx="10634472" cy="685800"/>
+            <a:off x="685800" y="3017520"/>
+            <a:ext cx="10817352" cy="1463040"/>
           </a:xfrm>
           <a:prstGeom prst="rect">
             <a:avLst/>
@@ -13095,9 +12904,9 @@
           <a:p>
             <a:pPr algn="l"/>
             <a:r>
-              <a:rPr sz="2400" b="1" i="0">
-                <a:solidFill>
-                  <a:srgbClr val="1F2C56"/>
+              <a:rPr sz="4000" b="1" i="0">
+                <a:solidFill>
+                  <a:srgbClr val="FFFFFF"/>
                 </a:solidFill>
                 <a:latin typeface="Arial"/>
               </a:rPr>
@@ -13108,57 +12917,49 @@
       </p:sp>
       <p:sp>
         <p:nvSpPr>
-          <p:cNvPr id="8" name="Rectangle 7"/>
-          <p:cNvSpPr/>
-          <p:nvPr/>
-        </p:nvSpPr>
-        <p:spPr>
-          <a:xfrm>
-            <a:off x="0" y="6510528"/>
-            <a:ext cx="12188952" cy="347472"/>
-          </a:xfrm>
-          <a:prstGeom prst="rect">
-            <a:avLst/>
-          </a:prstGeom>
-          <a:solidFill>
-            <a:srgbClr val="0A1937"/>
-          </a:solidFill>
-          <a:ln>
-            <a:noFill/>
-          </a:ln>
-        </p:spPr>
-        <p:style>
-          <a:lnRef idx="1">
-            <a:schemeClr val="accent1"/>
-          </a:lnRef>
-          <a:fillRef idx="3">
-            <a:schemeClr val="accent1"/>
-          </a:fillRef>
-          <a:effectRef idx="2">
-            <a:schemeClr val="accent1"/>
-          </a:effectRef>
-          <a:fontRef idx="minor">
-            <a:schemeClr val="lt1"/>
-          </a:fontRef>
-        </p:style>
-        <p:txBody>
-          <a:bodyPr rtlCol="0" anchor="ctr"/>
-          <a:lstStyle/>
-          <a:p>
-            <a:pPr algn="ctr"/>
-          </a:p>
-        </p:txBody>
-      </p:sp>
-      <p:sp>
-        <p:nvSpPr>
-          <p:cNvPr id="9" name="TextBox 8"/>
+          <p:cNvPr id="5" name="TextBox 4"/>
           <p:cNvSpPr txBox="1"/>
           <p:nvPr/>
         </p:nvSpPr>
         <p:spPr>
           <a:xfrm>
-            <a:off x="685800" y="6583680"/>
-            <a:ext cx="6490411" cy="256032"/>
+            <a:off x="685800" y="4480560"/>
+            <a:ext cx="8653881" cy="1280160"/>
+          </a:xfrm>
+          <a:prstGeom prst="rect">
+            <a:avLst/>
+          </a:prstGeom>
+          <a:noFill/>
+        </p:spPr>
+        <p:txBody>
+          <a:bodyPr wrap="square">
+            <a:spAutoFit/>
+          </a:bodyPr>
+          <a:lstStyle/>
+          <a:p>
+            <a:pPr algn="l"/>
+            <a:r>
+              <a:rPr sz="1600" b="0" i="0">
+                <a:solidFill>
+                  <a:srgbClr val="C8D2E6"/>
+                </a:solidFill>
+                <a:latin typeface="Arial"/>
+              </a:rPr>
+              <a:t>TL06 hat das Handwerk gelegt – TL07 fragt nach der Identität dahinter</a:t>
+            </a:r>
+          </a:p>
+        </p:txBody>
+      </p:sp>
+      <p:sp>
+        <p:nvSpPr>
+          <p:cNvPr id="6" name="TextBox 5"/>
+          <p:cNvSpPr txBox="1"/>
+          <p:nvPr/>
+        </p:nvSpPr>
+        <p:spPr>
+          <a:xfrm>
+            <a:off x="685800" y="6355080"/>
+            <a:ext cx="10817352" cy="274320"/>
           </a:xfrm>
           <a:prstGeom prst="rect">
             <a:avLst/>
@@ -13175,7 +12976,7 @@
             <a:r>
               <a:rPr sz="700">
                 <a:solidFill>
-                  <a:srgbClr val="A0B4D2"/>
+                  <a:srgbClr val="8CA0C3"/>
                 </a:solidFill>
                 <a:latin typeface="Consolas"/>
               </a:rPr>

--- a/protected-downloads/praesentation/TL07.pptx
+++ b/protected-downloads/praesentation/TL07.pptx
@@ -30,6 +30,7 @@
     <p:sldId id="278" r:id="rId30"/>
     <p:sldId id="279" r:id="rId31"/>
     <p:sldId id="280" r:id="rId32"/>
+    <p:sldId id="281" r:id="rId33"/>
   </p:sldIdLst>
   <p:sldSz cx="12188952" cy="6858000" type="screen4x3"/>
   <p:notesSz cx="6858000" cy="9144000"/>
@@ -596,22 +597,22 @@
           <a:lstStyle/>
           <a:p>
             <a:r>
-              <a:t>Zwischenerinnerung nach 12 Min.: 'Prüfen Sie in A3: Ist Ihre alternative Frage kürzer und offener als das Original – oder sind es drei Fragen in einer?'</a:t>
-            </a:r>
-          </a:p>
-          <a:p>
-            <a:r>
-              <a:t>Kollegiale Fallberatung (125–155 Min.) in 3–4er-Gruppen: Fall vorstellen → Schlüsselfrage → Perspektivwechsel Berater-Sicht → Coaching-Fragen vorschlagen → Klärung → konkreter nächster Schritt.</a:t>
-            </a:r>
-          </a:p>
-          <a:p>
-            <a:r>
-              <a:t>G-Phase im Plenum vorstellen lassen: Moderationsfrage 'Hören Sie das als der Berater – fühlen Sie sich gefragt oder verhört?'</a:t>
-            </a:r>
-          </a:p>
-          <a:p>
-            <a:r>
-              <a:t>Kein Rollenspiel – Textprüfung und Gesprächsvorbereitung.</a:t>
+              <a:t>TN lesen Fall still (ca. 3 Min.), dann gelenkte Plenumsdiskussion auf Frage 3: Warum ist der Moment 'Ich mache das Gespräch kaputt' ein entscheidender Coaching-Moment?</a:t>
+            </a:r>
+          </a:p>
+          <a:p>
+            <a:r>
+              <a:t>Häufigste Bewegung: TN wollen sofort entscheiden, ob Thomas auch mit Anleitung schneller geholfen wäre. Bremsen: 'Das ist nicht das Problem. Das Problem ist das innere Zögern – das löst keine Anleitung.'</a:t>
+            </a:r>
+          </a:p>
+          <a:p>
+            <a:r>
+              <a:t>Modus-Wechsel am Ende des Falls thematisieren: Lea wechselt in Anleitungsmodus erst als Thomas eine Fachfrage stellt (Konditionen). Warum genau jetzt – und nicht früher?</a:t>
+            </a:r>
+          </a:p>
+          <a:p>
+            <a:r>
+              <a:t>Analytische Fragen 2 und 4 in AB-1 Teil A transferieren – nicht alles im Plenum lösen.</a:t>
             </a:r>
           </a:p>
         </p:txBody>
@@ -681,22 +682,22 @@
           <a:lstStyle/>
           <a:p>
             <a:r>
-              <a:t>Zwischenerinnerung nach 15 Min.: 'Schritt 4 ist Freitext – denken Sie nicht in Programmen, sondern in konkreten Situationen.'</a:t>
-            </a:r>
-          </a:p>
-          <a:p>
-            <a:r>
-              <a:t>Qualitätskriterium sichtbar machen: 'Ich werde mehr coachen' ist kein Konzept. 'In der nächsten Teamrunde stelle ich bei der ersten Berater-Frage eine Gegenfrage' ist ein Konzept.</a:t>
-            </a:r>
-          </a:p>
-          <a:p>
-            <a:r>
-              <a:t>Fragen-Werkstatt (210–225 Min.): Je zwei TN lesen sich G-Frage vor – drei Analysekriterien: (1) Wie viele Fragezeichen? (2) Suggestiv? (3) Kurz genug für eine echte Frage? Dann 5 Min. stille Überarbeitung.</a:t>
-            </a:r>
-          </a:p>
-          <a:p>
-            <a:r>
-              <a:t>Plenum-Auswertung: Nur zweite Version vorstellen – macht Lernfortschritt im Raum sichtbar.</a:t>
+              <a:t>Zwischenerinnerung nach 12 Min.: 'Prüfen Sie in A3: Ist Ihre alternative Frage kürzer und offener als das Original – oder sind es drei Fragen in einer?'</a:t>
+            </a:r>
+          </a:p>
+          <a:p>
+            <a:r>
+              <a:t>Kollegiale Fallberatung (125–155 Min.) in 3–4er-Gruppen: Fall vorstellen → Schlüsselfrage → Perspektivwechsel Berater-Sicht → Coaching-Fragen vorschlagen → Klärung → konkreter nächster Schritt.</a:t>
+            </a:r>
+          </a:p>
+          <a:p>
+            <a:r>
+              <a:t>G-Phase im Plenum vorstellen lassen: Moderationsfrage 'Hören Sie das als der Berater – fühlen Sie sich gefragt oder verhört?'</a:t>
+            </a:r>
+          </a:p>
+          <a:p>
+            <a:r>
+              <a:t>Kein Rollenspiel – Textprüfung und Gesprächsvorbereitung.</a:t>
             </a:r>
           </a:p>
         </p:txBody>
@@ -766,17 +767,22 @@
           <a:lstStyle/>
           <a:p>
             <a:r>
-              <a:t>Selbstcheck (Sec 5) in Stille ausfüllen (ca. 3 Min.): Welche Frage ist die unbequemste?</a:t>
-            </a:r>
-          </a:p>
-          <a:p>
-            <a:r>
-              <a:t>Plenumsfrage: 'Was nehme ich heute mit – eine konkrete GROW-Frage, die ich diese Woche einmal verwende, anstatt sofort zu antworten?' 2–3 TN antworten lassen.</a:t>
-            </a:r>
-          </a:p>
-          <a:p>
-            <a:r>
-              <a:t>Bewertungsschwelle ansprechen: 3+ bei mindestens drei Selbstcheck-Fragen → TL09 aufsetzen. 2 oder weniger bei zwei Fragen → echten Fall in die nächste TL-Runde mitbringen.</a:t>
+              <a:t>Zwischenerinnerung nach 15 Min.: 'Schritt 4 ist Freitext – denken Sie nicht in Programmen, sondern in konkreten Situationen.'</a:t>
+            </a:r>
+          </a:p>
+          <a:p>
+            <a:r>
+              <a:t>Qualitätskriterium sichtbar machen: 'Ich werde mehr coachen' ist kein Konzept. 'In der nächsten Teamrunde stelle ich bei der ersten Berater-Frage eine Gegenfrage' ist ein Konzept.</a:t>
+            </a:r>
+          </a:p>
+          <a:p>
+            <a:r>
+              <a:t>Fragen-Werkstatt (210–225 Min.): Je zwei TN lesen sich G-Frage vor – drei Analysekriterien: (1) Wie viele Fragezeichen? (2) Suggestiv? (3) Kurz genug für eine echte Frage? Dann 5 Min. stille Überarbeitung.</a:t>
+            </a:r>
+          </a:p>
+          <a:p>
+            <a:r>
+              <a:t>Plenum-Auswertung: Nur zweite Version vorstellen – macht Lernfortschritt im Raum sichtbar.</a:t>
             </a:r>
           </a:p>
         </p:txBody>
@@ -802,6 +808,86 @@
 </file>
 
 <file path=ppt/notesSlides/notesSlide13.xml><?xml version="1.0" encoding="utf-8"?>
+<p:notes xmlns:a="http://schemas.openxmlformats.org/drawingml/2006/main" xmlns:p="http://schemas.openxmlformats.org/presentationml/2006/main" xmlns:r="http://schemas.openxmlformats.org/officeDocument/2006/relationships">
+  <p:cSld>
+    <p:spTree>
+      <p:nvGrpSpPr>
+        <p:cNvPr id="1" name=""/>
+        <p:cNvGrpSpPr/>
+        <p:nvPr/>
+      </p:nvGrpSpPr>
+      <p:grpSpPr>
+        <a:xfrm>
+          <a:off x="0" y="0"/>
+          <a:ext cx="0" cy="0"/>
+          <a:chOff x="0" y="0"/>
+          <a:chExt cx="0" cy="0"/>
+        </a:xfrm>
+      </p:grpSpPr>
+      <p:sp>
+        <p:nvSpPr>
+          <p:cNvPr id="2" name="Slide Image Placeholder 1"/>
+          <p:cNvSpPr>
+            <a:spLocks noGrp="1"/>
+          </p:cNvSpPr>
+          <p:nvPr>
+            <p:ph type="sldImg" idx="2"/>
+          </p:nvPr>
+        </p:nvSpPr>
+        <p:spPr/>
+      </p:sp>
+      <p:sp>
+        <p:nvSpPr>
+          <p:cNvPr id="3" name="Notes Placeholder 2"/>
+          <p:cNvSpPr>
+            <a:spLocks noGrp="1"/>
+          </p:cNvSpPr>
+          <p:nvPr>
+            <p:ph type="body" idx="3" sz="quarter"/>
+          </p:nvPr>
+        </p:nvSpPr>
+        <p:spPr/>
+        <p:txBody>
+          <a:bodyPr/>
+          <a:lstStyle/>
+          <a:p>
+            <a:r>
+              <a:t>Selbstcheck (Sec 5) in Stille ausfüllen (ca. 3 Min.): Welche Frage ist die unbequemste?</a:t>
+            </a:r>
+          </a:p>
+          <a:p>
+            <a:r>
+              <a:t>Plenumsfrage: 'Was nehme ich heute mit – eine konkrete GROW-Frage, die ich diese Woche einmal verwende, anstatt sofort zu antworten?' 2–3 TN antworten lassen.</a:t>
+            </a:r>
+          </a:p>
+          <a:p>
+            <a:r>
+              <a:t>Bewertungsschwelle ansprechen: 3+ bei mindestens drei Selbstcheck-Fragen → TL09 aufsetzen. 2 oder weniger bei zwei Fragen → echten Fall in die nächste TL-Runde mitbringen.</a:t>
+            </a:r>
+          </a:p>
+        </p:txBody>
+      </p:sp>
+      <p:sp>
+        <p:nvSpPr>
+          <p:cNvPr id="4" name="Slide Number Placeholder 3"/>
+          <p:cNvSpPr>
+            <a:spLocks noGrp="1"/>
+          </p:cNvSpPr>
+          <p:nvPr>
+            <p:ph type="sldNum" idx="5" sz="quarter"/>
+          </p:nvPr>
+        </p:nvSpPr>
+        <p:spPr/>
+      </p:sp>
+    </p:spTree>
+  </p:cSld>
+  <p:clrMapOvr>
+    <a:masterClrMapping/>
+  </p:clrMapOvr>
+</p:notes>
+</file>
+
+<file path=ppt/notesSlides/notesSlide14.xml><?xml version="1.0" encoding="utf-8"?>
 <p:notes xmlns:a="http://schemas.openxmlformats.org/drawingml/2006/main" xmlns:p="http://schemas.openxmlformats.org/presentationml/2006/main" xmlns:r="http://schemas.openxmlformats.org/officeDocument/2006/relationships">
   <p:cSld>
     <p:spTree>
@@ -8494,6 +8580,49 @@
             <a:avLst/>
           </a:prstGeom>
           <a:solidFill>
+            <a:srgbClr val="EDEDF3"/>
+          </a:solidFill>
+          <a:ln>
+            <a:noFill/>
+          </a:ln>
+        </p:spPr>
+        <p:style>
+          <a:lnRef idx="1">
+            <a:schemeClr val="accent1"/>
+          </a:lnRef>
+          <a:fillRef idx="3">
+            <a:schemeClr val="accent1"/>
+          </a:fillRef>
+          <a:effectRef idx="2">
+            <a:schemeClr val="accent1"/>
+          </a:effectRef>
+          <a:fontRef idx="minor">
+            <a:schemeClr val="lt1"/>
+          </a:fontRef>
+        </p:style>
+        <p:txBody>
+          <a:bodyPr rtlCol="0" anchor="ctr"/>
+          <a:lstStyle/>
+          <a:p>
+            <a:pPr algn="ctr"/>
+          </a:p>
+        </p:txBody>
+      </p:sp>
+      <p:sp>
+        <p:nvSpPr>
+          <p:cNvPr id="3" name="Rectangle 2"/>
+          <p:cNvSpPr/>
+          <p:nvPr/>
+        </p:nvSpPr>
+        <p:spPr>
+          <a:xfrm>
+            <a:off x="0" y="0"/>
+            <a:ext cx="12188952" cy="50292"/>
+          </a:xfrm>
+          <a:prstGeom prst="rect">
+            <a:avLst/>
+          </a:prstGeom>
+          <a:solidFill>
             <a:srgbClr val="1F2C56"/>
           </a:solidFill>
           <a:ln>
@@ -8524,14 +8653,14 @@
       </p:sp>
       <p:sp>
         <p:nvSpPr>
-          <p:cNvPr id="3" name="TextBox 2"/>
+          <p:cNvPr id="4" name="TextBox 3"/>
           <p:cNvSpPr txBox="1"/>
           <p:nvPr/>
         </p:nvSpPr>
         <p:spPr>
           <a:xfrm>
-            <a:off x="685800" y="2377440"/>
-            <a:ext cx="10817352" cy="365760"/>
+            <a:off x="685800" y="109728"/>
+            <a:ext cx="10817352" cy="228600"/>
           </a:xfrm>
           <a:prstGeom prst="rect">
             <a:avLst/>
@@ -8546,27 +8675,70 @@
           <a:p>
             <a:pPr algn="l"/>
             <a:r>
-              <a:rPr sz="1200">
-                <a:solidFill>
-                  <a:srgbClr val="D9C089"/>
+              <a:rPr sz="750">
+                <a:solidFill>
+                  <a:srgbClr val="78808C"/>
                 </a:solidFill>
                 <a:latin typeface="Consolas"/>
               </a:rPr>
-              <a:t>EINZELARBEIT + KOLLEGIALE FALLBERATUNG</a:t>
-            </a:r>
-          </a:p>
-        </p:txBody>
-      </p:sp>
-      <p:sp>
-        <p:nvSpPr>
-          <p:cNvPr id="4" name="Rectangle 3"/>
+              <a:t>TL07  ·  PRAXISFALL</a:t>
+            </a:r>
+          </a:p>
+        </p:txBody>
+      </p:sp>
+      <p:sp>
+        <p:nvSpPr>
+          <p:cNvPr id="5" name="Rectangle 4"/>
           <p:cNvSpPr/>
           <p:nvPr/>
         </p:nvSpPr>
         <p:spPr>
           <a:xfrm>
-            <a:off x="685800" y="2788920"/>
-            <a:ext cx="548640" cy="38100"/>
+            <a:off x="0" y="1234440"/>
+            <a:ext cx="12188952" cy="12700"/>
+          </a:xfrm>
+          <a:prstGeom prst="rect">
+            <a:avLst/>
+          </a:prstGeom>
+          <a:solidFill>
+            <a:srgbClr val="D8DFE4"/>
+          </a:solidFill>
+          <a:ln>
+            <a:noFill/>
+          </a:ln>
+        </p:spPr>
+        <p:style>
+          <a:lnRef idx="1">
+            <a:schemeClr val="accent1"/>
+          </a:lnRef>
+          <a:fillRef idx="3">
+            <a:schemeClr val="accent1"/>
+          </a:fillRef>
+          <a:effectRef idx="2">
+            <a:schemeClr val="accent1"/>
+          </a:effectRef>
+          <a:fontRef idx="minor">
+            <a:schemeClr val="lt1"/>
+          </a:fontRef>
+        </p:style>
+        <p:txBody>
+          <a:bodyPr rtlCol="0" anchor="ctr"/>
+          <a:lstStyle/>
+          <a:p>
+            <a:pPr algn="ctr"/>
+          </a:p>
+        </p:txBody>
+      </p:sp>
+      <p:sp>
+        <p:nvSpPr>
+          <p:cNvPr id="6" name="Rectangle 5"/>
+          <p:cNvSpPr/>
+          <p:nvPr/>
+        </p:nvSpPr>
+        <p:spPr>
+          <a:xfrm>
+            <a:off x="685800" y="502920"/>
+            <a:ext cx="36576" cy="658368"/>
           </a:xfrm>
           <a:prstGeom prst="rect">
             <a:avLst/>
@@ -8602,14 +8774,14 @@
       </p:sp>
       <p:sp>
         <p:nvSpPr>
-          <p:cNvPr id="5" name="TextBox 4"/>
+          <p:cNvPr id="7" name="TextBox 6"/>
           <p:cNvSpPr txBox="1"/>
           <p:nvPr/>
         </p:nvSpPr>
         <p:spPr>
           <a:xfrm>
-            <a:off x="685800" y="3017520"/>
-            <a:ext cx="10817352" cy="1463040"/>
+            <a:off x="813816" y="502920"/>
+            <a:ext cx="10634472" cy="685800"/>
           </a:xfrm>
           <a:prstGeom prst="rect">
             <a:avLst/>
@@ -8624,27 +8796,150 @@
           <a:p>
             <a:pPr algn="l"/>
             <a:r>
-              <a:rPr sz="4000" b="1" i="0">
-                <a:solidFill>
-                  <a:srgbClr val="FFFFFF"/>
+              <a:rPr sz="2400" b="1" i="0">
+                <a:solidFill>
+                  <a:srgbClr val="1F2C56"/>
                 </a:solidFill>
                 <a:latin typeface="Arial"/>
               </a:rPr>
-              <a:t>AB-1: GROW-Gespräch analysieren und eigenen Entwurf entwickeln</a:t>
-            </a:r>
-          </a:p>
-        </p:txBody>
-      </p:sp>
-      <p:sp>
-        <p:nvSpPr>
-          <p:cNvPr id="6" name="TextBox 5"/>
+              <a:t>Teamleiterin Lea Fischer – VR-Bank Musterregion eG</a:t>
+            </a:r>
+          </a:p>
+        </p:txBody>
+      </p:sp>
+      <p:sp>
+        <p:nvSpPr>
+          <p:cNvPr id="8" name="Rectangle 7"/>
+          <p:cNvSpPr/>
+          <p:nvPr/>
+        </p:nvSpPr>
+        <p:spPr>
+          <a:xfrm>
+            <a:off x="685800" y="1600200"/>
+            <a:ext cx="10817352" cy="1828800"/>
+          </a:xfrm>
+          <a:prstGeom prst="rect">
+            <a:avLst/>
+          </a:prstGeom>
+          <a:solidFill>
+            <a:srgbClr val="FFFFFF"/>
+          </a:solidFill>
+          <a:ln w="9525">
+            <a:solidFill>
+              <a:srgbClr val="D8DFE4"/>
+            </a:solidFill>
+          </a:ln>
+        </p:spPr>
+        <p:style>
+          <a:lnRef idx="1">
+            <a:schemeClr val="accent1"/>
+          </a:lnRef>
+          <a:fillRef idx="3">
+            <a:schemeClr val="accent1"/>
+          </a:fillRef>
+          <a:effectRef idx="2">
+            <a:schemeClr val="accent1"/>
+          </a:effectRef>
+          <a:fontRef idx="minor">
+            <a:schemeClr val="lt1"/>
+          </a:fontRef>
+        </p:style>
+        <p:txBody>
+          <a:bodyPr rtlCol="0" anchor="ctr"/>
+          <a:lstStyle/>
+          <a:p>
+            <a:pPr algn="ctr"/>
+          </a:p>
+        </p:txBody>
+      </p:sp>
+      <p:sp>
+        <p:nvSpPr>
+          <p:cNvPr id="9" name="Rectangle 8"/>
+          <p:cNvSpPr/>
+          <p:nvPr/>
+        </p:nvSpPr>
+        <p:spPr>
+          <a:xfrm>
+            <a:off x="685800" y="1600200"/>
+            <a:ext cx="36576" cy="1828800"/>
+          </a:xfrm>
+          <a:prstGeom prst="rect">
+            <a:avLst/>
+          </a:prstGeom>
+          <a:solidFill>
+            <a:srgbClr val="1F2C56"/>
+          </a:solidFill>
+          <a:ln>
+            <a:noFill/>
+          </a:ln>
+        </p:spPr>
+        <p:style>
+          <a:lnRef idx="1">
+            <a:schemeClr val="accent1"/>
+          </a:lnRef>
+          <a:fillRef idx="3">
+            <a:schemeClr val="accent1"/>
+          </a:fillRef>
+          <a:effectRef idx="2">
+            <a:schemeClr val="accent1"/>
+          </a:effectRef>
+          <a:fontRef idx="minor">
+            <a:schemeClr val="lt1"/>
+          </a:fontRef>
+        </p:style>
+        <p:txBody>
+          <a:bodyPr rtlCol="0" anchor="ctr"/>
+          <a:lstStyle/>
+          <a:p>
+            <a:pPr algn="ctr"/>
+          </a:p>
+        </p:txBody>
+      </p:sp>
+      <p:sp>
+        <p:nvSpPr>
+          <p:cNvPr id="10" name="TextBox 9"/>
           <p:cNvSpPr txBox="1"/>
           <p:nvPr/>
         </p:nvSpPr>
         <p:spPr>
           <a:xfrm>
-            <a:off x="685800" y="4480560"/>
-            <a:ext cx="8653881" cy="1280160"/>
+            <a:off x="941832" y="1783080"/>
+            <a:ext cx="10268712" cy="228600"/>
+          </a:xfrm>
+          <a:prstGeom prst="rect">
+            <a:avLst/>
+          </a:prstGeom>
+          <a:noFill/>
+        </p:spPr>
+        <p:txBody>
+          <a:bodyPr wrap="none">
+            <a:spAutoFit/>
+          </a:bodyPr>
+          <a:lstStyle/>
+          <a:p>
+            <a:pPr algn="l"/>
+            <a:r>
+              <a:rPr sz="750">
+                <a:solidFill>
+                  <a:srgbClr val="78808C"/>
+                </a:solidFill>
+                <a:latin typeface="Consolas"/>
+              </a:rPr>
+              <a:t>AUSGANGSSITUATION</a:t>
+            </a:r>
+          </a:p>
+        </p:txBody>
+      </p:sp>
+      <p:sp>
+        <p:nvSpPr>
+          <p:cNvPr id="11" name="TextBox 10"/>
+          <p:cNvSpPr txBox="1"/>
+          <p:nvPr/>
+        </p:nvSpPr>
+        <p:spPr>
+          <a:xfrm>
+            <a:off x="941832" y="2084831"/>
+            <a:ext cx="7680960" cy="1188720"/>
           </a:xfrm>
           <a:prstGeom prst="rect">
             <a:avLst/>
@@ -8657,29 +8952,77 @@
           </a:bodyPr>
           <a:lstStyle/>
           <a:p>
-            <a:pPr algn="l"/>
-            <a:r>
-              <a:rPr sz="1600" b="0" i="0">
-                <a:solidFill>
-                  <a:srgbClr val="C8D2E6"/>
+            <a:pPr>
+              <a:spcAft>
+                <a:spcPts val="600"/>
+              </a:spcAft>
+            </a:pPr>
+            <a:r>
+              <a:rPr sz="1300">
+                <a:solidFill>
+                  <a:srgbClr val="3D5466"/>
                 </a:solidFill>
                 <a:latin typeface="Arial"/>
               </a:rPr>
-              <a:t>Phasenanalyse Lea/Thomas + eigener GROW-Gesprächsentwurf</a:t>
-            </a:r>
-          </a:p>
-        </p:txBody>
-      </p:sp>
-      <p:sp>
-        <p:nvSpPr>
-          <p:cNvPr id="7" name="TextBox 6"/>
+              <a:t>Thomas G. (38 J., 11 Jahre im Haus, Senior) ist Leas stärkster Bestandskundenbetreuer – kein A-Kunde verloren in drei Jahren. Seit Monaten ist er zögerlich bei der aktiven Ansprache strukturierter Finanzierungsthemen: „Der Kunde ist zufrieden. Ich will die Beziehung nicht belasten.“ Heute kommt er mit dem Fall Haller GmbH (12 Mio. EUR Umsatz, Investitionsbedarf 1,4 Mio. EUR Lagerausbau) und fragt: „Wie soll ich da vorgehen?“ Lea kennt die fachliche Antwort. Sie entscheidet sich trotzdem für den Coaching-Modus.
+</a:t>
+            </a:r>
+          </a:p>
+        </p:txBody>
+      </p:sp>
+      <p:sp>
+        <p:nvSpPr>
+          <p:cNvPr id="12" name="Rectangle 11"/>
+          <p:cNvSpPr/>
+          <p:nvPr/>
+        </p:nvSpPr>
+        <p:spPr>
+          <a:xfrm>
+            <a:off x="0" y="6510528"/>
+            <a:ext cx="12188952" cy="347472"/>
+          </a:xfrm>
+          <a:prstGeom prst="rect">
+            <a:avLst/>
+          </a:prstGeom>
+          <a:solidFill>
+            <a:srgbClr val="0A1937"/>
+          </a:solidFill>
+          <a:ln>
+            <a:noFill/>
+          </a:ln>
+        </p:spPr>
+        <p:style>
+          <a:lnRef idx="1">
+            <a:schemeClr val="accent1"/>
+          </a:lnRef>
+          <a:fillRef idx="3">
+            <a:schemeClr val="accent1"/>
+          </a:fillRef>
+          <a:effectRef idx="2">
+            <a:schemeClr val="accent1"/>
+          </a:effectRef>
+          <a:fontRef idx="minor">
+            <a:schemeClr val="lt1"/>
+          </a:fontRef>
+        </p:style>
+        <p:txBody>
+          <a:bodyPr rtlCol="0" anchor="ctr"/>
+          <a:lstStyle/>
+          <a:p>
+            <a:pPr algn="ctr"/>
+          </a:p>
+        </p:txBody>
+      </p:sp>
+      <p:sp>
+        <p:nvSpPr>
+          <p:cNvPr id="13" name="TextBox 12"/>
           <p:cNvSpPr txBox="1"/>
           <p:nvPr/>
         </p:nvSpPr>
         <p:spPr>
           <a:xfrm>
-            <a:off x="685800" y="6355080"/>
-            <a:ext cx="10817352" cy="274320"/>
+            <a:off x="685800" y="6583680"/>
+            <a:ext cx="6490411" cy="256032"/>
           </a:xfrm>
           <a:prstGeom prst="rect">
             <a:avLst/>
@@ -8696,11 +9039,46 @@
             <a:r>
               <a:rPr sz="700">
                 <a:solidFill>
-                  <a:srgbClr val="8CA0C3"/>
+                  <a:srgbClr val="A0B4D2"/>
                 </a:solidFill>
                 <a:latin typeface="Consolas"/>
               </a:rPr>
               <a:t>FKB Campus  ·  TL07</a:t>
+            </a:r>
+          </a:p>
+        </p:txBody>
+      </p:sp>
+      <p:sp>
+        <p:nvSpPr>
+          <p:cNvPr id="14" name="TextBox 13"/>
+          <p:cNvSpPr txBox="1"/>
+          <p:nvPr/>
+        </p:nvSpPr>
+        <p:spPr>
+          <a:xfrm>
+            <a:off x="7176211" y="6583680"/>
+            <a:ext cx="4326940" cy="256032"/>
+          </a:xfrm>
+          <a:prstGeom prst="rect">
+            <a:avLst/>
+          </a:prstGeom>
+          <a:noFill/>
+        </p:spPr>
+        <p:txBody>
+          <a:bodyPr wrap="none">
+            <a:spAutoFit/>
+          </a:bodyPr>
+          <a:lstStyle/>
+          <a:p>
+            <a:pPr algn="r"/>
+            <a:r>
+              <a:rPr sz="700">
+                <a:solidFill>
+                  <a:srgbClr val="A0B4D2"/>
+                </a:solidFill>
+                <a:latin typeface="Consolas"/>
+              </a:rPr>
+              <a:t>Fall zuerst lesen</a:t>
             </a:r>
           </a:p>
         </p:txBody>
@@ -9168,7 +9546,7 @@
             <a:avLst/>
           </a:prstGeom>
           <a:solidFill>
-            <a:srgbClr val="EDEDF3"/>
+            <a:srgbClr val="1F2C56"/>
           </a:solidFill>
           <a:ln>
             <a:noFill/>
@@ -9198,57 +9576,14 @@
       </p:sp>
       <p:sp>
         <p:nvSpPr>
-          <p:cNvPr id="3" name="Rectangle 2"/>
-          <p:cNvSpPr/>
-          <p:nvPr/>
-        </p:nvSpPr>
-        <p:spPr>
-          <a:xfrm>
-            <a:off x="0" y="0"/>
-            <a:ext cx="12188952" cy="50292"/>
-          </a:xfrm>
-          <a:prstGeom prst="rect">
-            <a:avLst/>
-          </a:prstGeom>
-          <a:solidFill>
-            <a:srgbClr val="1F2C56"/>
-          </a:solidFill>
-          <a:ln>
-            <a:noFill/>
-          </a:ln>
-        </p:spPr>
-        <p:style>
-          <a:lnRef idx="1">
-            <a:schemeClr val="accent1"/>
-          </a:lnRef>
-          <a:fillRef idx="3">
-            <a:schemeClr val="accent1"/>
-          </a:fillRef>
-          <a:effectRef idx="2">
-            <a:schemeClr val="accent1"/>
-          </a:effectRef>
-          <a:fontRef idx="minor">
-            <a:schemeClr val="lt1"/>
-          </a:fontRef>
-        </p:style>
-        <p:txBody>
-          <a:bodyPr rtlCol="0" anchor="ctr"/>
-          <a:lstStyle/>
-          <a:p>
-            <a:pPr algn="ctr"/>
-          </a:p>
-        </p:txBody>
-      </p:sp>
-      <p:sp>
-        <p:nvSpPr>
-          <p:cNvPr id="4" name="TextBox 3"/>
+          <p:cNvPr id="3" name="TextBox 2"/>
           <p:cNvSpPr txBox="1"/>
           <p:nvPr/>
         </p:nvSpPr>
         <p:spPr>
           <a:xfrm>
-            <a:off x="685800" y="109728"/>
-            <a:ext cx="10817352" cy="228600"/>
+            <a:off x="685800" y="2377440"/>
+            <a:ext cx="10817352" cy="365760"/>
           </a:xfrm>
           <a:prstGeom prst="rect">
             <a:avLst/>
@@ -9263,70 +9598,27 @@
           <a:p>
             <a:pPr algn="l"/>
             <a:r>
-              <a:rPr sz="750">
-                <a:solidFill>
-                  <a:srgbClr val="78808C"/>
+              <a:rPr sz="1200">
+                <a:solidFill>
+                  <a:srgbClr val="D9C089"/>
                 </a:solidFill>
                 <a:latin typeface="Consolas"/>
               </a:rPr>
-              <a:t>TL07  ·  ARBEITSBLATT</a:t>
-            </a:r>
-          </a:p>
-        </p:txBody>
-      </p:sp>
-      <p:sp>
-        <p:nvSpPr>
-          <p:cNvPr id="5" name="Rectangle 4"/>
+              <a:t>EINZELARBEIT + KOLLEGIALE FALLBERATUNG</a:t>
+            </a:r>
+          </a:p>
+        </p:txBody>
+      </p:sp>
+      <p:sp>
+        <p:nvSpPr>
+          <p:cNvPr id="4" name="Rectangle 3"/>
           <p:cNvSpPr/>
           <p:nvPr/>
         </p:nvSpPr>
         <p:spPr>
           <a:xfrm>
-            <a:off x="0" y="1234440"/>
-            <a:ext cx="12188952" cy="12700"/>
-          </a:xfrm>
-          <a:prstGeom prst="rect">
-            <a:avLst/>
-          </a:prstGeom>
-          <a:solidFill>
-            <a:srgbClr val="D8DFE4"/>
-          </a:solidFill>
-          <a:ln>
-            <a:noFill/>
-          </a:ln>
-        </p:spPr>
-        <p:style>
-          <a:lnRef idx="1">
-            <a:schemeClr val="accent1"/>
-          </a:lnRef>
-          <a:fillRef idx="3">
-            <a:schemeClr val="accent1"/>
-          </a:fillRef>
-          <a:effectRef idx="2">
-            <a:schemeClr val="accent1"/>
-          </a:effectRef>
-          <a:fontRef idx="minor">
-            <a:schemeClr val="lt1"/>
-          </a:fontRef>
-        </p:style>
-        <p:txBody>
-          <a:bodyPr rtlCol="0" anchor="ctr"/>
-          <a:lstStyle/>
-          <a:p>
-            <a:pPr algn="ctr"/>
-          </a:p>
-        </p:txBody>
-      </p:sp>
-      <p:sp>
-        <p:nvSpPr>
-          <p:cNvPr id="6" name="Rectangle 5"/>
-          <p:cNvSpPr/>
-          <p:nvPr/>
-        </p:nvSpPr>
-        <p:spPr>
-          <a:xfrm>
-            <a:off x="685800" y="502920"/>
-            <a:ext cx="36576" cy="658368"/>
+            <a:off x="685800" y="2788920"/>
+            <a:ext cx="548640" cy="38100"/>
           </a:xfrm>
           <a:prstGeom prst="rect">
             <a:avLst/>
@@ -9362,14 +9654,14 @@
       </p:sp>
       <p:sp>
         <p:nvSpPr>
-          <p:cNvPr id="7" name="TextBox 6"/>
+          <p:cNvPr id="5" name="TextBox 4"/>
           <p:cNvSpPr txBox="1"/>
           <p:nvPr/>
         </p:nvSpPr>
         <p:spPr>
           <a:xfrm>
-            <a:off x="813816" y="502920"/>
-            <a:ext cx="10634472" cy="685800"/>
+            <a:off x="685800" y="3017520"/>
+            <a:ext cx="10817352" cy="1463040"/>
           </a:xfrm>
           <a:prstGeom prst="rect">
             <a:avLst/>
@@ -9384,27 +9676,27 @@
           <a:p>
             <a:pPr algn="l"/>
             <a:r>
-              <a:rPr sz="2400" b="1" i="0">
-                <a:solidFill>
-                  <a:srgbClr val="1F2C56"/>
+              <a:rPr sz="4000" b="1" i="0">
+                <a:solidFill>
+                  <a:srgbClr val="FFFFFF"/>
                 </a:solidFill>
                 <a:latin typeface="Arial"/>
               </a:rPr>
-              <a:t>AB-1: Zuerst analysieren, dann selbst entwerfen</a:t>
-            </a:r>
-          </a:p>
-        </p:txBody>
-      </p:sp>
-      <p:sp>
-        <p:nvSpPr>
-          <p:cNvPr id="8" name="TextBox 7"/>
+              <a:t>AB-1: GROW-Gespräch analysieren und eigenen Entwurf entwickeln</a:t>
+            </a:r>
+          </a:p>
+        </p:txBody>
+      </p:sp>
+      <p:sp>
+        <p:nvSpPr>
+          <p:cNvPr id="6" name="TextBox 5"/>
           <p:cNvSpPr txBox="1"/>
           <p:nvPr/>
         </p:nvSpPr>
         <p:spPr>
           <a:xfrm>
-            <a:off x="685800" y="1554480"/>
-            <a:ext cx="10817352" cy="3840480"/>
+            <a:off x="685800" y="4480560"/>
+            <a:ext cx="8653881" cy="1280160"/>
           </a:xfrm>
           <a:prstGeom prst="rect">
             <a:avLst/>
@@ -9417,233 +9709,29 @@
           </a:bodyPr>
           <a:lstStyle/>
           <a:p>
-            <a:pPr marL="190500" indent="-190500">
-              <a:spcBef>
-                <a:spcPts val="400"/>
-              </a:spcBef>
-              <a:spcAft>
-                <a:spcPts val="200"/>
-              </a:spcAft>
-            </a:pPr>
-            <a:r>
-              <a:rPr sz="1400">
-                <a:solidFill>
-                  <a:srgbClr val="3D5466"/>
+            <a:pPr algn="l"/>
+            <a:r>
+              <a:rPr sz="1600" b="0" i="0">
+                <a:solidFill>
+                  <a:srgbClr val="C8D2E6"/>
                 </a:solidFill>
                 <a:latin typeface="Arial"/>
               </a:rPr>
-              <a:t>▸  Teil A: Phasenanalyse Lea/Thomas – G/R/O/W zuordnen.</a:t>
-            </a:r>
-          </a:p>
-          <a:p>
-            <a:pPr marL="190500" indent="-190500">
-              <a:spcBef>
-                <a:spcPts val="400"/>
-              </a:spcBef>
-              <a:spcAft>
-                <a:spcPts val="200"/>
-              </a:spcAft>
-            </a:pPr>
-            <a:r>
-              <a:rPr sz="1400">
-                <a:solidFill>
-                  <a:srgbClr val="3D5466"/>
-                </a:solidFill>
-                <a:latin typeface="Arial"/>
-              </a:rPr>
-              <a:t>▸  A2: Leas Modus-Wechsel beurteilen – Situations-Matrix nutzen.</a:t>
-            </a:r>
-          </a:p>
-          <a:p>
-            <a:pPr marL="190500" indent="-190500">
-              <a:spcBef>
-                <a:spcPts val="400"/>
-              </a:spcBef>
-              <a:spcAft>
-                <a:spcPts val="200"/>
-              </a:spcAft>
-            </a:pPr>
-            <a:r>
-              <a:rPr sz="1400">
-                <a:solidFill>
-                  <a:srgbClr val="3D5466"/>
-                </a:solidFill>
-                <a:latin typeface="Arial"/>
-              </a:rPr>
-              <a:t>▸  A3: Kraftvollere Alternative formulieren und begründen.</a:t>
-            </a:r>
-          </a:p>
-          <a:p>
-            <a:pPr marL="190500" indent="-190500">
-              <a:spcBef>
-                <a:spcPts val="400"/>
-              </a:spcBef>
-              <a:spcAft>
-                <a:spcPts val="200"/>
-              </a:spcAft>
-            </a:pPr>
-            <a:r>
-              <a:rPr sz="1400">
-                <a:solidFill>
-                  <a:srgbClr val="3D5466"/>
-                </a:solidFill>
-                <a:latin typeface="Arial"/>
-              </a:rPr>
-              <a:t>▸  Teil B: Voraussetzungsprüfung (Kompetenz/Bereitschaft/Zeit).</a:t>
-            </a:r>
-          </a:p>
-          <a:p>
-            <a:pPr marL="190500" indent="-190500">
-              <a:spcBef>
-                <a:spcPts val="400"/>
-              </a:spcBef>
-              <a:spcAft>
-                <a:spcPts val="200"/>
-              </a:spcAft>
-            </a:pPr>
-            <a:r>
-              <a:rPr sz="1400">
-                <a:solidFill>
-                  <a:srgbClr val="3D5466"/>
-                </a:solidFill>
-                <a:latin typeface="Arial"/>
-              </a:rPr>
-              <a:t>▸  B: Eigene G/R/O/W-Fragen + Rückdelegationsreflex-Check.</a:t>
-            </a:r>
-          </a:p>
-        </p:txBody>
-      </p:sp>
-      <p:sp>
-        <p:nvSpPr>
-          <p:cNvPr id="9" name="Rectangle 8"/>
-          <p:cNvSpPr/>
-          <p:nvPr/>
-        </p:nvSpPr>
-        <p:spPr>
-          <a:xfrm>
-            <a:off x="685800" y="5486400"/>
-            <a:ext cx="10817352" cy="640080"/>
-          </a:xfrm>
-          <a:prstGeom prst="rect">
-            <a:avLst/>
-          </a:prstGeom>
-          <a:solidFill>
-            <a:srgbClr val="1F2C56"/>
-          </a:solidFill>
-          <a:ln>
-            <a:noFill/>
-          </a:ln>
-        </p:spPr>
-        <p:style>
-          <a:lnRef idx="1">
-            <a:schemeClr val="accent1"/>
-          </a:lnRef>
-          <a:fillRef idx="3">
-            <a:schemeClr val="accent1"/>
-          </a:fillRef>
-          <a:effectRef idx="2">
-            <a:schemeClr val="accent1"/>
-          </a:effectRef>
-          <a:fontRef idx="minor">
-            <a:schemeClr val="lt1"/>
-          </a:fontRef>
-        </p:style>
-        <p:txBody>
-          <a:bodyPr rtlCol="0" anchor="ctr"/>
-          <a:lstStyle/>
-          <a:p>
-            <a:pPr algn="ctr"/>
-          </a:p>
-        </p:txBody>
-      </p:sp>
-      <p:sp>
-        <p:nvSpPr>
-          <p:cNvPr id="10" name="TextBox 9"/>
+              <a:t>Phasenanalyse Lea/Thomas + eigener GROW-Gesprächsentwurf</a:t>
+            </a:r>
+          </a:p>
+        </p:txBody>
+      </p:sp>
+      <p:sp>
+        <p:nvSpPr>
+          <p:cNvPr id="7" name="TextBox 6"/>
           <p:cNvSpPr txBox="1"/>
           <p:nvPr/>
         </p:nvSpPr>
         <p:spPr>
           <a:xfrm>
-            <a:off x="868680" y="5596128"/>
-            <a:ext cx="10451592" cy="457200"/>
-          </a:xfrm>
-          <a:prstGeom prst="rect">
-            <a:avLst/>
-          </a:prstGeom>
-          <a:noFill/>
-        </p:spPr>
-        <p:txBody>
-          <a:bodyPr wrap="square">
-            <a:spAutoFit/>
-          </a:bodyPr>
-          <a:lstStyle/>
-          <a:p>
-            <a:pPr algn="l"/>
-            <a:r>
-              <a:rPr sz="1300" b="1" i="0">
-                <a:solidFill>
-                  <a:srgbClr val="FFFFFF"/>
-                </a:solidFill>
-                <a:latin typeface="Arial"/>
-              </a:rPr>
-              <a:t>→  Bearbeitung im Teilnehmer-Workbook (Arbeitsblatt mit Ausfüllfeldern)</a:t>
-            </a:r>
-          </a:p>
-        </p:txBody>
-      </p:sp>
-      <p:sp>
-        <p:nvSpPr>
-          <p:cNvPr id="11" name="Rectangle 10"/>
-          <p:cNvSpPr/>
-          <p:nvPr/>
-        </p:nvSpPr>
-        <p:spPr>
-          <a:xfrm>
-            <a:off x="0" y="6510528"/>
-            <a:ext cx="12188952" cy="347472"/>
-          </a:xfrm>
-          <a:prstGeom prst="rect">
-            <a:avLst/>
-          </a:prstGeom>
-          <a:solidFill>
-            <a:srgbClr val="0A1937"/>
-          </a:solidFill>
-          <a:ln>
-            <a:noFill/>
-          </a:ln>
-        </p:spPr>
-        <p:style>
-          <a:lnRef idx="1">
-            <a:schemeClr val="accent1"/>
-          </a:lnRef>
-          <a:fillRef idx="3">
-            <a:schemeClr val="accent1"/>
-          </a:fillRef>
-          <a:effectRef idx="2">
-            <a:schemeClr val="accent1"/>
-          </a:effectRef>
-          <a:fontRef idx="minor">
-            <a:schemeClr val="lt1"/>
-          </a:fontRef>
-        </p:style>
-        <p:txBody>
-          <a:bodyPr rtlCol="0" anchor="ctr"/>
-          <a:lstStyle/>
-          <a:p>
-            <a:pPr algn="ctr"/>
-          </a:p>
-        </p:txBody>
-      </p:sp>
-      <p:sp>
-        <p:nvSpPr>
-          <p:cNvPr id="12" name="TextBox 11"/>
-          <p:cNvSpPr txBox="1"/>
-          <p:nvPr/>
-        </p:nvSpPr>
-        <p:spPr>
-          <a:xfrm>
-            <a:off x="685800" y="6583680"/>
-            <a:ext cx="6490411" cy="256032"/>
+            <a:off x="685800" y="6355080"/>
+            <a:ext cx="10817352" cy="274320"/>
           </a:xfrm>
           <a:prstGeom prst="rect">
             <a:avLst/>
@@ -9660,7 +9748,7 @@
             <a:r>
               <a:rPr sz="700">
                 <a:solidFill>
-                  <a:srgbClr val="A0B4D2"/>
+                  <a:srgbClr val="8CA0C3"/>
                 </a:solidFill>
                 <a:latin typeface="Consolas"/>
               </a:rPr>
@@ -9702,6 +9790,49 @@
             <a:avLst/>
           </a:prstGeom>
           <a:solidFill>
+            <a:srgbClr val="EDEDF3"/>
+          </a:solidFill>
+          <a:ln>
+            <a:noFill/>
+          </a:ln>
+        </p:spPr>
+        <p:style>
+          <a:lnRef idx="1">
+            <a:schemeClr val="accent1"/>
+          </a:lnRef>
+          <a:fillRef idx="3">
+            <a:schemeClr val="accent1"/>
+          </a:fillRef>
+          <a:effectRef idx="2">
+            <a:schemeClr val="accent1"/>
+          </a:effectRef>
+          <a:fontRef idx="minor">
+            <a:schemeClr val="lt1"/>
+          </a:fontRef>
+        </p:style>
+        <p:txBody>
+          <a:bodyPr rtlCol="0" anchor="ctr"/>
+          <a:lstStyle/>
+          <a:p>
+            <a:pPr algn="ctr"/>
+          </a:p>
+        </p:txBody>
+      </p:sp>
+      <p:sp>
+        <p:nvSpPr>
+          <p:cNvPr id="3" name="Rectangle 2"/>
+          <p:cNvSpPr/>
+          <p:nvPr/>
+        </p:nvSpPr>
+        <p:spPr>
+          <a:xfrm>
+            <a:off x="0" y="0"/>
+            <a:ext cx="12188952" cy="50292"/>
+          </a:xfrm>
+          <a:prstGeom prst="rect">
+            <a:avLst/>
+          </a:prstGeom>
+          <a:solidFill>
             <a:srgbClr val="1F2C56"/>
           </a:solidFill>
           <a:ln>
@@ -9732,14 +9863,14 @@
       </p:sp>
       <p:sp>
         <p:nvSpPr>
-          <p:cNvPr id="3" name="TextBox 2"/>
+          <p:cNvPr id="4" name="TextBox 3"/>
           <p:cNvSpPr txBox="1"/>
           <p:nvPr/>
         </p:nvSpPr>
         <p:spPr>
           <a:xfrm>
-            <a:off x="685800" y="2377440"/>
-            <a:ext cx="10817352" cy="365760"/>
+            <a:off x="685800" y="109728"/>
+            <a:ext cx="10817352" cy="228600"/>
           </a:xfrm>
           <a:prstGeom prst="rect">
             <a:avLst/>
@@ -9754,27 +9885,70 @@
           <a:p>
             <a:pPr algn="l"/>
             <a:r>
-              <a:rPr sz="1200">
-                <a:solidFill>
-                  <a:srgbClr val="D9C089"/>
+              <a:rPr sz="750">
+                <a:solidFill>
+                  <a:srgbClr val="78808C"/>
                 </a:solidFill>
                 <a:latin typeface="Consolas"/>
               </a:rPr>
-              <a:t>EINZELARBEIT + FRAGEN-WERKSTATT</a:t>
-            </a:r>
-          </a:p>
-        </p:txBody>
-      </p:sp>
-      <p:sp>
-        <p:nvSpPr>
-          <p:cNvPr id="4" name="Rectangle 3"/>
+              <a:t>TL07  ·  ARBEITSBLATT</a:t>
+            </a:r>
+          </a:p>
+        </p:txBody>
+      </p:sp>
+      <p:sp>
+        <p:nvSpPr>
+          <p:cNvPr id="5" name="Rectangle 4"/>
           <p:cNvSpPr/>
           <p:nvPr/>
         </p:nvSpPr>
         <p:spPr>
           <a:xfrm>
-            <a:off x="685800" y="2788920"/>
-            <a:ext cx="548640" cy="38100"/>
+            <a:off x="0" y="1234440"/>
+            <a:ext cx="12188952" cy="12700"/>
+          </a:xfrm>
+          <a:prstGeom prst="rect">
+            <a:avLst/>
+          </a:prstGeom>
+          <a:solidFill>
+            <a:srgbClr val="D8DFE4"/>
+          </a:solidFill>
+          <a:ln>
+            <a:noFill/>
+          </a:ln>
+        </p:spPr>
+        <p:style>
+          <a:lnRef idx="1">
+            <a:schemeClr val="accent1"/>
+          </a:lnRef>
+          <a:fillRef idx="3">
+            <a:schemeClr val="accent1"/>
+          </a:fillRef>
+          <a:effectRef idx="2">
+            <a:schemeClr val="accent1"/>
+          </a:effectRef>
+          <a:fontRef idx="minor">
+            <a:schemeClr val="lt1"/>
+          </a:fontRef>
+        </p:style>
+        <p:txBody>
+          <a:bodyPr rtlCol="0" anchor="ctr"/>
+          <a:lstStyle/>
+          <a:p>
+            <a:pPr algn="ctr"/>
+          </a:p>
+        </p:txBody>
+      </p:sp>
+      <p:sp>
+        <p:nvSpPr>
+          <p:cNvPr id="6" name="Rectangle 5"/>
+          <p:cNvSpPr/>
+          <p:nvPr/>
+        </p:nvSpPr>
+        <p:spPr>
+          <a:xfrm>
+            <a:off x="685800" y="502920"/>
+            <a:ext cx="36576" cy="658368"/>
           </a:xfrm>
           <a:prstGeom prst="rect">
             <a:avLst/>
@@ -9810,14 +9984,14 @@
       </p:sp>
       <p:sp>
         <p:nvSpPr>
-          <p:cNvPr id="5" name="TextBox 4"/>
+          <p:cNvPr id="7" name="TextBox 6"/>
           <p:cNvSpPr txBox="1"/>
           <p:nvPr/>
         </p:nvSpPr>
         <p:spPr>
           <a:xfrm>
-            <a:off x="685800" y="3017520"/>
-            <a:ext cx="10817352" cy="1463040"/>
+            <a:off x="813816" y="502920"/>
+            <a:ext cx="10634472" cy="685800"/>
           </a:xfrm>
           <a:prstGeom prst="rect">
             <a:avLst/>
@@ -9832,27 +10006,27 @@
           <a:p>
             <a:pPr algn="l"/>
             <a:r>
-              <a:rPr sz="4000" b="1" i="0">
-                <a:solidFill>
-                  <a:srgbClr val="FFFFFF"/>
+              <a:rPr sz="2400" b="1" i="0">
+                <a:solidFill>
+                  <a:srgbClr val="1F2C56"/>
                 </a:solidFill>
                 <a:latin typeface="Arial"/>
               </a:rPr>
-              <a:t>AB-2: Coaching-Kultur im Team gestalten – Konzeptentwurf</a:t>
-            </a:r>
-          </a:p>
-        </p:txBody>
-      </p:sp>
-      <p:sp>
-        <p:nvSpPr>
-          <p:cNvPr id="6" name="TextBox 5"/>
+              <a:t>AB-1: Zuerst analysieren, dann selbst entwerfen</a:t>
+            </a:r>
+          </a:p>
+        </p:txBody>
+      </p:sp>
+      <p:sp>
+        <p:nvSpPr>
+          <p:cNvPr id="8" name="TextBox 7"/>
           <p:cNvSpPr txBox="1"/>
           <p:nvPr/>
         </p:nvSpPr>
         <p:spPr>
           <a:xfrm>
-            <a:off x="685800" y="4480560"/>
-            <a:ext cx="8653881" cy="1280160"/>
+            <a:off x="685800" y="1554480"/>
+            <a:ext cx="10817352" cy="3840480"/>
           </a:xfrm>
           <a:prstGeom prst="rect">
             <a:avLst/>
@@ -9865,29 +10039,233 @@
           </a:bodyPr>
           <a:lstStyle/>
           <a:p>
+            <a:pPr marL="190500" indent="-190500">
+              <a:spcBef>
+                <a:spcPts val="400"/>
+              </a:spcBef>
+              <a:spcAft>
+                <a:spcPts val="200"/>
+              </a:spcAft>
+            </a:pPr>
+            <a:r>
+              <a:rPr sz="1400">
+                <a:solidFill>
+                  <a:srgbClr val="3D5466"/>
+                </a:solidFill>
+                <a:latin typeface="Arial"/>
+              </a:rPr>
+              <a:t>▸  Teil A: Phasenanalyse Lea/Thomas – G/R/O/W zuordnen.</a:t>
+            </a:r>
+          </a:p>
+          <a:p>
+            <a:pPr marL="190500" indent="-190500">
+              <a:spcBef>
+                <a:spcPts val="400"/>
+              </a:spcBef>
+              <a:spcAft>
+                <a:spcPts val="200"/>
+              </a:spcAft>
+            </a:pPr>
+            <a:r>
+              <a:rPr sz="1400">
+                <a:solidFill>
+                  <a:srgbClr val="3D5466"/>
+                </a:solidFill>
+                <a:latin typeface="Arial"/>
+              </a:rPr>
+              <a:t>▸  A2: Leas Modus-Wechsel beurteilen – Situations-Matrix nutzen.</a:t>
+            </a:r>
+          </a:p>
+          <a:p>
+            <a:pPr marL="190500" indent="-190500">
+              <a:spcBef>
+                <a:spcPts val="400"/>
+              </a:spcBef>
+              <a:spcAft>
+                <a:spcPts val="200"/>
+              </a:spcAft>
+            </a:pPr>
+            <a:r>
+              <a:rPr sz="1400">
+                <a:solidFill>
+                  <a:srgbClr val="3D5466"/>
+                </a:solidFill>
+                <a:latin typeface="Arial"/>
+              </a:rPr>
+              <a:t>▸  A3: Kraftvollere Alternative formulieren und begründen.</a:t>
+            </a:r>
+          </a:p>
+          <a:p>
+            <a:pPr marL="190500" indent="-190500">
+              <a:spcBef>
+                <a:spcPts val="400"/>
+              </a:spcBef>
+              <a:spcAft>
+                <a:spcPts val="200"/>
+              </a:spcAft>
+            </a:pPr>
+            <a:r>
+              <a:rPr sz="1400">
+                <a:solidFill>
+                  <a:srgbClr val="3D5466"/>
+                </a:solidFill>
+                <a:latin typeface="Arial"/>
+              </a:rPr>
+              <a:t>▸  Teil B: Voraussetzungsprüfung (Kompetenz/Bereitschaft/Zeit).</a:t>
+            </a:r>
+          </a:p>
+          <a:p>
+            <a:pPr marL="190500" indent="-190500">
+              <a:spcBef>
+                <a:spcPts val="400"/>
+              </a:spcBef>
+              <a:spcAft>
+                <a:spcPts val="200"/>
+              </a:spcAft>
+            </a:pPr>
+            <a:r>
+              <a:rPr sz="1400">
+                <a:solidFill>
+                  <a:srgbClr val="3D5466"/>
+                </a:solidFill>
+                <a:latin typeface="Arial"/>
+              </a:rPr>
+              <a:t>▸  B: Eigene G/R/O/W-Fragen + Rückdelegationsreflex-Check.</a:t>
+            </a:r>
+          </a:p>
+        </p:txBody>
+      </p:sp>
+      <p:sp>
+        <p:nvSpPr>
+          <p:cNvPr id="9" name="Rectangle 8"/>
+          <p:cNvSpPr/>
+          <p:nvPr/>
+        </p:nvSpPr>
+        <p:spPr>
+          <a:xfrm>
+            <a:off x="685800" y="5486400"/>
+            <a:ext cx="10817352" cy="640080"/>
+          </a:xfrm>
+          <a:prstGeom prst="rect">
+            <a:avLst/>
+          </a:prstGeom>
+          <a:solidFill>
+            <a:srgbClr val="1F2C56"/>
+          </a:solidFill>
+          <a:ln>
+            <a:noFill/>
+          </a:ln>
+        </p:spPr>
+        <p:style>
+          <a:lnRef idx="1">
+            <a:schemeClr val="accent1"/>
+          </a:lnRef>
+          <a:fillRef idx="3">
+            <a:schemeClr val="accent1"/>
+          </a:fillRef>
+          <a:effectRef idx="2">
+            <a:schemeClr val="accent1"/>
+          </a:effectRef>
+          <a:fontRef idx="minor">
+            <a:schemeClr val="lt1"/>
+          </a:fontRef>
+        </p:style>
+        <p:txBody>
+          <a:bodyPr rtlCol="0" anchor="ctr"/>
+          <a:lstStyle/>
+          <a:p>
+            <a:pPr algn="ctr"/>
+          </a:p>
+        </p:txBody>
+      </p:sp>
+      <p:sp>
+        <p:nvSpPr>
+          <p:cNvPr id="10" name="TextBox 9"/>
+          <p:cNvSpPr txBox="1"/>
+          <p:nvPr/>
+        </p:nvSpPr>
+        <p:spPr>
+          <a:xfrm>
+            <a:off x="868680" y="5596128"/>
+            <a:ext cx="10451592" cy="457200"/>
+          </a:xfrm>
+          <a:prstGeom prst="rect">
+            <a:avLst/>
+          </a:prstGeom>
+          <a:noFill/>
+        </p:spPr>
+        <p:txBody>
+          <a:bodyPr wrap="square">
+            <a:spAutoFit/>
+          </a:bodyPr>
+          <a:lstStyle/>
+          <a:p>
             <a:pPr algn="l"/>
             <a:r>
-              <a:rPr sz="1600" b="0" i="0">
-                <a:solidFill>
-                  <a:srgbClr val="C8D2E6"/>
+              <a:rPr sz="1300" b="1" i="0">
+                <a:solidFill>
+                  <a:srgbClr val="FFFFFF"/>
                 </a:solidFill>
                 <a:latin typeface="Arial"/>
               </a:rPr>
-              <a:t>Coaching-Haltung als Teamkultur entwerfen (Bloom-Stufe 6)</a:t>
-            </a:r>
-          </a:p>
-        </p:txBody>
-      </p:sp>
-      <p:sp>
-        <p:nvSpPr>
-          <p:cNvPr id="7" name="TextBox 6"/>
+              <a:t>→  Bearbeitung im Teilnehmer-Workbook (Arbeitsblatt mit Ausfüllfeldern)</a:t>
+            </a:r>
+          </a:p>
+        </p:txBody>
+      </p:sp>
+      <p:sp>
+        <p:nvSpPr>
+          <p:cNvPr id="11" name="Rectangle 10"/>
+          <p:cNvSpPr/>
+          <p:nvPr/>
+        </p:nvSpPr>
+        <p:spPr>
+          <a:xfrm>
+            <a:off x="0" y="6510528"/>
+            <a:ext cx="12188952" cy="347472"/>
+          </a:xfrm>
+          <a:prstGeom prst="rect">
+            <a:avLst/>
+          </a:prstGeom>
+          <a:solidFill>
+            <a:srgbClr val="0A1937"/>
+          </a:solidFill>
+          <a:ln>
+            <a:noFill/>
+          </a:ln>
+        </p:spPr>
+        <p:style>
+          <a:lnRef idx="1">
+            <a:schemeClr val="accent1"/>
+          </a:lnRef>
+          <a:fillRef idx="3">
+            <a:schemeClr val="accent1"/>
+          </a:fillRef>
+          <a:effectRef idx="2">
+            <a:schemeClr val="accent1"/>
+          </a:effectRef>
+          <a:fontRef idx="minor">
+            <a:schemeClr val="lt1"/>
+          </a:fontRef>
+        </p:style>
+        <p:txBody>
+          <a:bodyPr rtlCol="0" anchor="ctr"/>
+          <a:lstStyle/>
+          <a:p>
+            <a:pPr algn="ctr"/>
+          </a:p>
+        </p:txBody>
+      </p:sp>
+      <p:sp>
+        <p:nvSpPr>
+          <p:cNvPr id="12" name="TextBox 11"/>
           <p:cNvSpPr txBox="1"/>
           <p:nvPr/>
         </p:nvSpPr>
         <p:spPr>
           <a:xfrm>
-            <a:off x="685800" y="6355080"/>
-            <a:ext cx="10817352" cy="274320"/>
+            <a:off x="685800" y="6583680"/>
+            <a:ext cx="6490411" cy="256032"/>
           </a:xfrm>
           <a:prstGeom prst="rect">
             <a:avLst/>
@@ -9904,7 +10282,7 @@
             <a:r>
               <a:rPr sz="700">
                 <a:solidFill>
-                  <a:srgbClr val="8CA0C3"/>
+                  <a:srgbClr val="A0B4D2"/>
                 </a:solidFill>
                 <a:latin typeface="Consolas"/>
               </a:rPr>
@@ -9946,7 +10324,7 @@
             <a:avLst/>
           </a:prstGeom>
           <a:solidFill>
-            <a:srgbClr val="EDEDF3"/>
+            <a:srgbClr val="1F2C56"/>
           </a:solidFill>
           <a:ln>
             <a:noFill/>
@@ -9976,57 +10354,14 @@
       </p:sp>
       <p:sp>
         <p:nvSpPr>
-          <p:cNvPr id="3" name="Rectangle 2"/>
-          <p:cNvSpPr/>
-          <p:nvPr/>
-        </p:nvSpPr>
-        <p:spPr>
-          <a:xfrm>
-            <a:off x="0" y="0"/>
-            <a:ext cx="12188952" cy="50292"/>
-          </a:xfrm>
-          <a:prstGeom prst="rect">
-            <a:avLst/>
-          </a:prstGeom>
-          <a:solidFill>
-            <a:srgbClr val="1F2C56"/>
-          </a:solidFill>
-          <a:ln>
-            <a:noFill/>
-          </a:ln>
-        </p:spPr>
-        <p:style>
-          <a:lnRef idx="1">
-            <a:schemeClr val="accent1"/>
-          </a:lnRef>
-          <a:fillRef idx="3">
-            <a:schemeClr val="accent1"/>
-          </a:fillRef>
-          <a:effectRef idx="2">
-            <a:schemeClr val="accent1"/>
-          </a:effectRef>
-          <a:fontRef idx="minor">
-            <a:schemeClr val="lt1"/>
-          </a:fontRef>
-        </p:style>
-        <p:txBody>
-          <a:bodyPr rtlCol="0" anchor="ctr"/>
-          <a:lstStyle/>
-          <a:p>
-            <a:pPr algn="ctr"/>
-          </a:p>
-        </p:txBody>
-      </p:sp>
-      <p:sp>
-        <p:nvSpPr>
-          <p:cNvPr id="4" name="TextBox 3"/>
+          <p:cNvPr id="3" name="TextBox 2"/>
           <p:cNvSpPr txBox="1"/>
           <p:nvPr/>
         </p:nvSpPr>
         <p:spPr>
           <a:xfrm>
-            <a:off x="685800" y="109728"/>
-            <a:ext cx="10817352" cy="228600"/>
+            <a:off x="685800" y="2377440"/>
+            <a:ext cx="10817352" cy="365760"/>
           </a:xfrm>
           <a:prstGeom prst="rect">
             <a:avLst/>
@@ -10041,70 +10376,27 @@
           <a:p>
             <a:pPr algn="l"/>
             <a:r>
-              <a:rPr sz="750">
-                <a:solidFill>
-                  <a:srgbClr val="78808C"/>
+              <a:rPr sz="1200">
+                <a:solidFill>
+                  <a:srgbClr val="D9C089"/>
                 </a:solidFill>
                 <a:latin typeface="Consolas"/>
               </a:rPr>
-              <a:t>TL07  ·  ARBEITSBLATT</a:t>
-            </a:r>
-          </a:p>
-        </p:txBody>
-      </p:sp>
-      <p:sp>
-        <p:nvSpPr>
-          <p:cNvPr id="5" name="Rectangle 4"/>
+              <a:t>EINZELARBEIT + FRAGEN-WERKSTATT</a:t>
+            </a:r>
+          </a:p>
+        </p:txBody>
+      </p:sp>
+      <p:sp>
+        <p:nvSpPr>
+          <p:cNvPr id="4" name="Rectangle 3"/>
           <p:cNvSpPr/>
           <p:nvPr/>
         </p:nvSpPr>
         <p:spPr>
           <a:xfrm>
-            <a:off x="0" y="1234440"/>
-            <a:ext cx="12188952" cy="12700"/>
-          </a:xfrm>
-          <a:prstGeom prst="rect">
-            <a:avLst/>
-          </a:prstGeom>
-          <a:solidFill>
-            <a:srgbClr val="D8DFE4"/>
-          </a:solidFill>
-          <a:ln>
-            <a:noFill/>
-          </a:ln>
-        </p:spPr>
-        <p:style>
-          <a:lnRef idx="1">
-            <a:schemeClr val="accent1"/>
-          </a:lnRef>
-          <a:fillRef idx="3">
-            <a:schemeClr val="accent1"/>
-          </a:fillRef>
-          <a:effectRef idx="2">
-            <a:schemeClr val="accent1"/>
-          </a:effectRef>
-          <a:fontRef idx="minor">
-            <a:schemeClr val="lt1"/>
-          </a:fontRef>
-        </p:style>
-        <p:txBody>
-          <a:bodyPr rtlCol="0" anchor="ctr"/>
-          <a:lstStyle/>
-          <a:p>
-            <a:pPr algn="ctr"/>
-          </a:p>
-        </p:txBody>
-      </p:sp>
-      <p:sp>
-        <p:nvSpPr>
-          <p:cNvPr id="6" name="Rectangle 5"/>
-          <p:cNvSpPr/>
-          <p:nvPr/>
-        </p:nvSpPr>
-        <p:spPr>
-          <a:xfrm>
-            <a:off x="685800" y="502920"/>
-            <a:ext cx="36576" cy="658368"/>
+            <a:off x="685800" y="2788920"/>
+            <a:ext cx="548640" cy="38100"/>
           </a:xfrm>
           <a:prstGeom prst="rect">
             <a:avLst/>
@@ -10140,14 +10432,14 @@
       </p:sp>
       <p:sp>
         <p:nvSpPr>
-          <p:cNvPr id="7" name="TextBox 6"/>
+          <p:cNvPr id="5" name="TextBox 4"/>
           <p:cNvSpPr txBox="1"/>
           <p:nvPr/>
         </p:nvSpPr>
         <p:spPr>
           <a:xfrm>
-            <a:off x="813816" y="502920"/>
-            <a:ext cx="10634472" cy="685800"/>
+            <a:off x="685800" y="3017520"/>
+            <a:ext cx="10817352" cy="1463040"/>
           </a:xfrm>
           <a:prstGeom prst="rect">
             <a:avLst/>
@@ -10162,27 +10454,27 @@
           <a:p>
             <a:pPr algn="l"/>
             <a:r>
-              <a:rPr sz="2400" b="1" i="0">
-                <a:solidFill>
-                  <a:srgbClr val="1F2C56"/>
+              <a:rPr sz="4000" b="1" i="0">
+                <a:solidFill>
+                  <a:srgbClr val="FFFFFF"/>
                 </a:solidFill>
                 <a:latin typeface="Arial"/>
               </a:rPr>
-              <a:t>AB-2: Kein Programm – hundert kleine Momente</a:t>
-            </a:r>
-          </a:p>
-        </p:txBody>
-      </p:sp>
-      <p:sp>
-        <p:nvSpPr>
-          <p:cNvPr id="8" name="TextBox 7"/>
+              <a:t>AB-2: Coaching-Kultur im Team gestalten – Konzeptentwurf</a:t>
+            </a:r>
+          </a:p>
+        </p:txBody>
+      </p:sp>
+      <p:sp>
+        <p:nvSpPr>
+          <p:cNvPr id="6" name="TextBox 5"/>
           <p:cNvSpPr txBox="1"/>
           <p:nvPr/>
         </p:nvSpPr>
         <p:spPr>
           <a:xfrm>
-            <a:off x="685800" y="1554480"/>
-            <a:ext cx="10817352" cy="3840480"/>
+            <a:off x="685800" y="4480560"/>
+            <a:ext cx="8653881" cy="1280160"/>
           </a:xfrm>
           <a:prstGeom prst="rect">
             <a:avLst/>
@@ -10195,214 +10487,29 @@
           </a:bodyPr>
           <a:lstStyle/>
           <a:p>
-            <a:pPr marL="190500" indent="-190500">
-              <a:spcBef>
-                <a:spcPts val="400"/>
-              </a:spcBef>
-              <a:spcAft>
-                <a:spcPts val="200"/>
-              </a:spcAft>
-            </a:pPr>
-            <a:r>
-              <a:rPr sz="1400">
-                <a:solidFill>
-                  <a:srgbClr val="3D5466"/>
+            <a:pPr algn="l"/>
+            <a:r>
+              <a:rPr sz="1600" b="0" i="0">
+                <a:solidFill>
+                  <a:srgbClr val="C8D2E6"/>
                 </a:solidFill>
                 <a:latin typeface="Arial"/>
               </a:rPr>
-              <a:t>▸  Schritt 1: Wo bin ich im Anleitungsmodus, obwohl Coaching möglich wäre?</a:t>
-            </a:r>
-          </a:p>
-          <a:p>
-            <a:pPr marL="190500" indent="-190500">
-              <a:spcBef>
-                <a:spcPts val="400"/>
-              </a:spcBef>
-              <a:spcAft>
-                <a:spcPts val="200"/>
-              </a:spcAft>
-            </a:pPr>
-            <a:r>
-              <a:rPr sz="1400">
-                <a:solidFill>
-                  <a:srgbClr val="3D5466"/>
-                </a:solidFill>
-                <a:latin typeface="Arial"/>
-              </a:rPr>
-              <a:t>▸  Schritt 2: Drei Alltagsmomente in Coaching-Momente verwandeln.</a:t>
-            </a:r>
-          </a:p>
-          <a:p>
-            <a:pPr marL="190500" indent="-190500">
-              <a:spcBef>
-                <a:spcPts val="400"/>
-              </a:spcBef>
-              <a:spcAft>
-                <a:spcPts val="200"/>
-              </a:spcAft>
-            </a:pPr>
-            <a:r>
-              <a:rPr sz="1400">
-                <a:solidFill>
-                  <a:srgbClr val="3D5466"/>
-                </a:solidFill>
-                <a:latin typeface="Arial"/>
-              </a:rPr>
-              <a:t>▸  Schritt 3: Grenzen benennen – wann ist Coaching kontraproduktiv?</a:t>
-            </a:r>
-          </a:p>
-          <a:p>
-            <a:pPr marL="190500" indent="-190500">
-              <a:spcBef>
-                <a:spcPts val="400"/>
-              </a:spcBef>
-              <a:spcAft>
-                <a:spcPts val="200"/>
-              </a:spcAft>
-            </a:pPr>
-            <a:r>
-              <a:rPr sz="1400">
-                <a:solidFill>
-                  <a:srgbClr val="3D5466"/>
-                </a:solidFill>
-                <a:latin typeface="Arial"/>
-              </a:rPr>
-              <a:t>▸  Schritt 4: Konzept-Freitext – was ändere ich morgen früh konkret?</a:t>
-            </a:r>
-          </a:p>
-        </p:txBody>
-      </p:sp>
-      <p:sp>
-        <p:nvSpPr>
-          <p:cNvPr id="9" name="Rectangle 8"/>
-          <p:cNvSpPr/>
-          <p:nvPr/>
-        </p:nvSpPr>
-        <p:spPr>
-          <a:xfrm>
-            <a:off x="685800" y="5486400"/>
-            <a:ext cx="10817352" cy="640080"/>
-          </a:xfrm>
-          <a:prstGeom prst="rect">
-            <a:avLst/>
-          </a:prstGeom>
-          <a:solidFill>
-            <a:srgbClr val="1F2C56"/>
-          </a:solidFill>
-          <a:ln>
-            <a:noFill/>
-          </a:ln>
-        </p:spPr>
-        <p:style>
-          <a:lnRef idx="1">
-            <a:schemeClr val="accent1"/>
-          </a:lnRef>
-          <a:fillRef idx="3">
-            <a:schemeClr val="accent1"/>
-          </a:fillRef>
-          <a:effectRef idx="2">
-            <a:schemeClr val="accent1"/>
-          </a:effectRef>
-          <a:fontRef idx="minor">
-            <a:schemeClr val="lt1"/>
-          </a:fontRef>
-        </p:style>
-        <p:txBody>
-          <a:bodyPr rtlCol="0" anchor="ctr"/>
-          <a:lstStyle/>
-          <a:p>
-            <a:pPr algn="ctr"/>
-          </a:p>
-        </p:txBody>
-      </p:sp>
-      <p:sp>
-        <p:nvSpPr>
-          <p:cNvPr id="10" name="TextBox 9"/>
+              <a:t>Coaching-Haltung als Teamkultur entwerfen (Bloom-Stufe 6)</a:t>
+            </a:r>
+          </a:p>
+        </p:txBody>
+      </p:sp>
+      <p:sp>
+        <p:nvSpPr>
+          <p:cNvPr id="7" name="TextBox 6"/>
           <p:cNvSpPr txBox="1"/>
           <p:nvPr/>
         </p:nvSpPr>
         <p:spPr>
           <a:xfrm>
-            <a:off x="868680" y="5596128"/>
-            <a:ext cx="10451592" cy="457200"/>
-          </a:xfrm>
-          <a:prstGeom prst="rect">
-            <a:avLst/>
-          </a:prstGeom>
-          <a:noFill/>
-        </p:spPr>
-        <p:txBody>
-          <a:bodyPr wrap="square">
-            <a:spAutoFit/>
-          </a:bodyPr>
-          <a:lstStyle/>
-          <a:p>
-            <a:pPr algn="l"/>
-            <a:r>
-              <a:rPr sz="1300" b="1" i="0">
-                <a:solidFill>
-                  <a:srgbClr val="FFFFFF"/>
-                </a:solidFill>
-                <a:latin typeface="Arial"/>
-              </a:rPr>
-              <a:t>→  Bearbeitung im Teilnehmer-Workbook (Arbeitsblatt mit Ausfüllfeldern)</a:t>
-            </a:r>
-          </a:p>
-        </p:txBody>
-      </p:sp>
-      <p:sp>
-        <p:nvSpPr>
-          <p:cNvPr id="11" name="Rectangle 10"/>
-          <p:cNvSpPr/>
-          <p:nvPr/>
-        </p:nvSpPr>
-        <p:spPr>
-          <a:xfrm>
-            <a:off x="0" y="6510528"/>
-            <a:ext cx="12188952" cy="347472"/>
-          </a:xfrm>
-          <a:prstGeom prst="rect">
-            <a:avLst/>
-          </a:prstGeom>
-          <a:solidFill>
-            <a:srgbClr val="0A1937"/>
-          </a:solidFill>
-          <a:ln>
-            <a:noFill/>
-          </a:ln>
-        </p:spPr>
-        <p:style>
-          <a:lnRef idx="1">
-            <a:schemeClr val="accent1"/>
-          </a:lnRef>
-          <a:fillRef idx="3">
-            <a:schemeClr val="accent1"/>
-          </a:fillRef>
-          <a:effectRef idx="2">
-            <a:schemeClr val="accent1"/>
-          </a:effectRef>
-          <a:fontRef idx="minor">
-            <a:schemeClr val="lt1"/>
-          </a:fontRef>
-        </p:style>
-        <p:txBody>
-          <a:bodyPr rtlCol="0" anchor="ctr"/>
-          <a:lstStyle/>
-          <a:p>
-            <a:pPr algn="ctr"/>
-          </a:p>
-        </p:txBody>
-      </p:sp>
-      <p:sp>
-        <p:nvSpPr>
-          <p:cNvPr id="12" name="TextBox 11"/>
-          <p:cNvSpPr txBox="1"/>
-          <p:nvPr/>
-        </p:nvSpPr>
-        <p:spPr>
-          <a:xfrm>
-            <a:off x="685800" y="6583680"/>
-            <a:ext cx="6490411" cy="256032"/>
+            <a:off x="685800" y="6355080"/>
+            <a:ext cx="10817352" cy="274320"/>
           </a:xfrm>
           <a:prstGeom prst="rect">
             <a:avLst/>
@@ -10419,7 +10526,7 @@
             <a:r>
               <a:rPr sz="700">
                 <a:solidFill>
-                  <a:srgbClr val="A0B4D2"/>
+                  <a:srgbClr val="8CA0C3"/>
                 </a:solidFill>
                 <a:latin typeface="Consolas"/>
               </a:rPr>
@@ -10461,6 +10568,49 @@
             <a:avLst/>
           </a:prstGeom>
           <a:solidFill>
+            <a:srgbClr val="EDEDF3"/>
+          </a:solidFill>
+          <a:ln>
+            <a:noFill/>
+          </a:ln>
+        </p:spPr>
+        <p:style>
+          <a:lnRef idx="1">
+            <a:schemeClr val="accent1"/>
+          </a:lnRef>
+          <a:fillRef idx="3">
+            <a:schemeClr val="accent1"/>
+          </a:fillRef>
+          <a:effectRef idx="2">
+            <a:schemeClr val="accent1"/>
+          </a:effectRef>
+          <a:fontRef idx="minor">
+            <a:schemeClr val="lt1"/>
+          </a:fontRef>
+        </p:style>
+        <p:txBody>
+          <a:bodyPr rtlCol="0" anchor="ctr"/>
+          <a:lstStyle/>
+          <a:p>
+            <a:pPr algn="ctr"/>
+          </a:p>
+        </p:txBody>
+      </p:sp>
+      <p:sp>
+        <p:nvSpPr>
+          <p:cNvPr id="3" name="Rectangle 2"/>
+          <p:cNvSpPr/>
+          <p:nvPr/>
+        </p:nvSpPr>
+        <p:spPr>
+          <a:xfrm>
+            <a:off x="0" y="0"/>
+            <a:ext cx="12188952" cy="50292"/>
+          </a:xfrm>
+          <a:prstGeom prst="rect">
+            <a:avLst/>
+          </a:prstGeom>
+          <a:solidFill>
             <a:srgbClr val="1F2C56"/>
           </a:solidFill>
           <a:ln>
@@ -10491,14 +10641,14 @@
       </p:sp>
       <p:sp>
         <p:nvSpPr>
-          <p:cNvPr id="3" name="TextBox 2"/>
+          <p:cNvPr id="4" name="TextBox 3"/>
           <p:cNvSpPr txBox="1"/>
           <p:nvPr/>
         </p:nvSpPr>
         <p:spPr>
           <a:xfrm>
-            <a:off x="685800" y="2377440"/>
-            <a:ext cx="10817352" cy="365760"/>
+            <a:off x="685800" y="109728"/>
+            <a:ext cx="10817352" cy="228600"/>
           </a:xfrm>
           <a:prstGeom prst="rect">
             <a:avLst/>
@@ -10513,27 +10663,70 @@
           <a:p>
             <a:pPr algn="l"/>
             <a:r>
-              <a:rPr sz="1200">
-                <a:solidFill>
-                  <a:srgbClr val="D9C089"/>
+              <a:rPr sz="750">
+                <a:solidFill>
+                  <a:srgbClr val="78808C"/>
                 </a:solidFill>
                 <a:latin typeface="Consolas"/>
               </a:rPr>
-              <a:t>ABSCHLUSS</a:t>
-            </a:r>
-          </a:p>
-        </p:txBody>
-      </p:sp>
-      <p:sp>
-        <p:nvSpPr>
-          <p:cNvPr id="4" name="Rectangle 3"/>
+              <a:t>TL07  ·  ARBEITSBLATT</a:t>
+            </a:r>
+          </a:p>
+        </p:txBody>
+      </p:sp>
+      <p:sp>
+        <p:nvSpPr>
+          <p:cNvPr id="5" name="Rectangle 4"/>
           <p:cNvSpPr/>
           <p:nvPr/>
         </p:nvSpPr>
         <p:spPr>
           <a:xfrm>
-            <a:off x="685800" y="2788920"/>
-            <a:ext cx="548640" cy="38100"/>
+            <a:off x="0" y="1234440"/>
+            <a:ext cx="12188952" cy="12700"/>
+          </a:xfrm>
+          <a:prstGeom prst="rect">
+            <a:avLst/>
+          </a:prstGeom>
+          <a:solidFill>
+            <a:srgbClr val="D8DFE4"/>
+          </a:solidFill>
+          <a:ln>
+            <a:noFill/>
+          </a:ln>
+        </p:spPr>
+        <p:style>
+          <a:lnRef idx="1">
+            <a:schemeClr val="accent1"/>
+          </a:lnRef>
+          <a:fillRef idx="3">
+            <a:schemeClr val="accent1"/>
+          </a:fillRef>
+          <a:effectRef idx="2">
+            <a:schemeClr val="accent1"/>
+          </a:effectRef>
+          <a:fontRef idx="minor">
+            <a:schemeClr val="lt1"/>
+          </a:fontRef>
+        </p:style>
+        <p:txBody>
+          <a:bodyPr rtlCol="0" anchor="ctr"/>
+          <a:lstStyle/>
+          <a:p>
+            <a:pPr algn="ctr"/>
+          </a:p>
+        </p:txBody>
+      </p:sp>
+      <p:sp>
+        <p:nvSpPr>
+          <p:cNvPr id="6" name="Rectangle 5"/>
+          <p:cNvSpPr/>
+          <p:nvPr/>
+        </p:nvSpPr>
+        <p:spPr>
+          <a:xfrm>
+            <a:off x="685800" y="502920"/>
+            <a:ext cx="36576" cy="658368"/>
           </a:xfrm>
           <a:prstGeom prst="rect">
             <a:avLst/>
@@ -10569,14 +10762,14 @@
       </p:sp>
       <p:sp>
         <p:nvSpPr>
-          <p:cNvPr id="5" name="TextBox 4"/>
+          <p:cNvPr id="7" name="TextBox 6"/>
           <p:cNvSpPr txBox="1"/>
           <p:nvPr/>
         </p:nvSpPr>
         <p:spPr>
           <a:xfrm>
-            <a:off x="685800" y="3017520"/>
-            <a:ext cx="10817352" cy="1463040"/>
+            <a:off x="813816" y="502920"/>
+            <a:ext cx="10634472" cy="685800"/>
           </a:xfrm>
           <a:prstGeom prst="rect">
             <a:avLst/>
@@ -10591,27 +10784,27 @@
           <a:p>
             <a:pPr algn="l"/>
             <a:r>
-              <a:rPr sz="4000" b="1" i="0">
-                <a:solidFill>
-                  <a:srgbClr val="FFFFFF"/>
+              <a:rPr sz="2400" b="1" i="0">
+                <a:solidFill>
+                  <a:srgbClr val="1F2C56"/>
                 </a:solidFill>
                 <a:latin typeface="Arial"/>
               </a:rPr>
-              <a:t>Transfer &amp; Haltung</a:t>
-            </a:r>
-          </a:p>
-        </p:txBody>
-      </p:sp>
-      <p:sp>
-        <p:nvSpPr>
-          <p:cNvPr id="6" name="TextBox 5"/>
+              <a:t>AB-2: Kein Programm – hundert kleine Momente</a:t>
+            </a:r>
+          </a:p>
+        </p:txBody>
+      </p:sp>
+      <p:sp>
+        <p:nvSpPr>
+          <p:cNvPr id="8" name="TextBox 7"/>
           <p:cNvSpPr txBox="1"/>
           <p:nvPr/>
         </p:nvSpPr>
         <p:spPr>
           <a:xfrm>
-            <a:off x="685800" y="4480560"/>
-            <a:ext cx="8653881" cy="1280160"/>
+            <a:off x="685800" y="1554480"/>
+            <a:ext cx="10817352" cy="3840480"/>
           </a:xfrm>
           <a:prstGeom prst="rect">
             <a:avLst/>
@@ -10624,29 +10817,214 @@
           </a:bodyPr>
           <a:lstStyle/>
           <a:p>
+            <a:pPr marL="190500" indent="-190500">
+              <a:spcBef>
+                <a:spcPts val="400"/>
+              </a:spcBef>
+              <a:spcAft>
+                <a:spcPts val="200"/>
+              </a:spcAft>
+            </a:pPr>
+            <a:r>
+              <a:rPr sz="1400">
+                <a:solidFill>
+                  <a:srgbClr val="3D5466"/>
+                </a:solidFill>
+                <a:latin typeface="Arial"/>
+              </a:rPr>
+              <a:t>▸  Schritt 1: Wo bin ich im Anleitungsmodus, obwohl Coaching möglich wäre?</a:t>
+            </a:r>
+          </a:p>
+          <a:p>
+            <a:pPr marL="190500" indent="-190500">
+              <a:spcBef>
+                <a:spcPts val="400"/>
+              </a:spcBef>
+              <a:spcAft>
+                <a:spcPts val="200"/>
+              </a:spcAft>
+            </a:pPr>
+            <a:r>
+              <a:rPr sz="1400">
+                <a:solidFill>
+                  <a:srgbClr val="3D5466"/>
+                </a:solidFill>
+                <a:latin typeface="Arial"/>
+              </a:rPr>
+              <a:t>▸  Schritt 2: Drei Alltagsmomente in Coaching-Momente verwandeln.</a:t>
+            </a:r>
+          </a:p>
+          <a:p>
+            <a:pPr marL="190500" indent="-190500">
+              <a:spcBef>
+                <a:spcPts val="400"/>
+              </a:spcBef>
+              <a:spcAft>
+                <a:spcPts val="200"/>
+              </a:spcAft>
+            </a:pPr>
+            <a:r>
+              <a:rPr sz="1400">
+                <a:solidFill>
+                  <a:srgbClr val="3D5466"/>
+                </a:solidFill>
+                <a:latin typeface="Arial"/>
+              </a:rPr>
+              <a:t>▸  Schritt 3: Grenzen benennen – wann ist Coaching kontraproduktiv?</a:t>
+            </a:r>
+          </a:p>
+          <a:p>
+            <a:pPr marL="190500" indent="-190500">
+              <a:spcBef>
+                <a:spcPts val="400"/>
+              </a:spcBef>
+              <a:spcAft>
+                <a:spcPts val="200"/>
+              </a:spcAft>
+            </a:pPr>
+            <a:r>
+              <a:rPr sz="1400">
+                <a:solidFill>
+                  <a:srgbClr val="3D5466"/>
+                </a:solidFill>
+                <a:latin typeface="Arial"/>
+              </a:rPr>
+              <a:t>▸  Schritt 4: Konzept-Freitext – was ändere ich morgen früh konkret?</a:t>
+            </a:r>
+          </a:p>
+        </p:txBody>
+      </p:sp>
+      <p:sp>
+        <p:nvSpPr>
+          <p:cNvPr id="9" name="Rectangle 8"/>
+          <p:cNvSpPr/>
+          <p:nvPr/>
+        </p:nvSpPr>
+        <p:spPr>
+          <a:xfrm>
+            <a:off x="685800" y="5486400"/>
+            <a:ext cx="10817352" cy="640080"/>
+          </a:xfrm>
+          <a:prstGeom prst="rect">
+            <a:avLst/>
+          </a:prstGeom>
+          <a:solidFill>
+            <a:srgbClr val="1F2C56"/>
+          </a:solidFill>
+          <a:ln>
+            <a:noFill/>
+          </a:ln>
+        </p:spPr>
+        <p:style>
+          <a:lnRef idx="1">
+            <a:schemeClr val="accent1"/>
+          </a:lnRef>
+          <a:fillRef idx="3">
+            <a:schemeClr val="accent1"/>
+          </a:fillRef>
+          <a:effectRef idx="2">
+            <a:schemeClr val="accent1"/>
+          </a:effectRef>
+          <a:fontRef idx="minor">
+            <a:schemeClr val="lt1"/>
+          </a:fontRef>
+        </p:style>
+        <p:txBody>
+          <a:bodyPr rtlCol="0" anchor="ctr"/>
+          <a:lstStyle/>
+          <a:p>
+            <a:pPr algn="ctr"/>
+          </a:p>
+        </p:txBody>
+      </p:sp>
+      <p:sp>
+        <p:nvSpPr>
+          <p:cNvPr id="10" name="TextBox 9"/>
+          <p:cNvSpPr txBox="1"/>
+          <p:nvPr/>
+        </p:nvSpPr>
+        <p:spPr>
+          <a:xfrm>
+            <a:off x="868680" y="5596128"/>
+            <a:ext cx="10451592" cy="457200"/>
+          </a:xfrm>
+          <a:prstGeom prst="rect">
+            <a:avLst/>
+          </a:prstGeom>
+          <a:noFill/>
+        </p:spPr>
+        <p:txBody>
+          <a:bodyPr wrap="square">
+            <a:spAutoFit/>
+          </a:bodyPr>
+          <a:lstStyle/>
+          <a:p>
             <a:pPr algn="l"/>
             <a:r>
-              <a:rPr sz="1600" b="0" i="0">
-                <a:solidFill>
-                  <a:srgbClr val="C8D2E6"/>
+              <a:rPr sz="1300" b="1" i="0">
+                <a:solidFill>
+                  <a:srgbClr val="FFFFFF"/>
                 </a:solidFill>
                 <a:latin typeface="Arial"/>
               </a:rPr>
-              <a:t>Drei Aufgaben für vier Wochen – Greenleaf-Test – Brücke TL09</a:t>
-            </a:r>
-          </a:p>
-        </p:txBody>
-      </p:sp>
-      <p:sp>
-        <p:nvSpPr>
-          <p:cNvPr id="7" name="TextBox 6"/>
+              <a:t>→  Bearbeitung im Teilnehmer-Workbook (Arbeitsblatt mit Ausfüllfeldern)</a:t>
+            </a:r>
+          </a:p>
+        </p:txBody>
+      </p:sp>
+      <p:sp>
+        <p:nvSpPr>
+          <p:cNvPr id="11" name="Rectangle 10"/>
+          <p:cNvSpPr/>
+          <p:nvPr/>
+        </p:nvSpPr>
+        <p:spPr>
+          <a:xfrm>
+            <a:off x="0" y="6510528"/>
+            <a:ext cx="12188952" cy="347472"/>
+          </a:xfrm>
+          <a:prstGeom prst="rect">
+            <a:avLst/>
+          </a:prstGeom>
+          <a:solidFill>
+            <a:srgbClr val="0A1937"/>
+          </a:solidFill>
+          <a:ln>
+            <a:noFill/>
+          </a:ln>
+        </p:spPr>
+        <p:style>
+          <a:lnRef idx="1">
+            <a:schemeClr val="accent1"/>
+          </a:lnRef>
+          <a:fillRef idx="3">
+            <a:schemeClr val="accent1"/>
+          </a:fillRef>
+          <a:effectRef idx="2">
+            <a:schemeClr val="accent1"/>
+          </a:effectRef>
+          <a:fontRef idx="minor">
+            <a:schemeClr val="lt1"/>
+          </a:fontRef>
+        </p:style>
+        <p:txBody>
+          <a:bodyPr rtlCol="0" anchor="ctr"/>
+          <a:lstStyle/>
+          <a:p>
+            <a:pPr algn="ctr"/>
+          </a:p>
+        </p:txBody>
+      </p:sp>
+      <p:sp>
+        <p:nvSpPr>
+          <p:cNvPr id="12" name="TextBox 11"/>
           <p:cNvSpPr txBox="1"/>
           <p:nvPr/>
         </p:nvSpPr>
         <p:spPr>
           <a:xfrm>
-            <a:off x="685800" y="6355080"/>
-            <a:ext cx="10817352" cy="274320"/>
+            <a:off x="685800" y="6583680"/>
+            <a:ext cx="6490411" cy="256032"/>
           </a:xfrm>
           <a:prstGeom prst="rect">
             <a:avLst/>
@@ -10663,7 +11041,7 @@
             <a:r>
               <a:rPr sz="700">
                 <a:solidFill>
-                  <a:srgbClr val="8CA0C3"/>
+                  <a:srgbClr val="A0B4D2"/>
                 </a:solidFill>
                 <a:latin typeface="Consolas"/>
               </a:rPr>
@@ -10705,7 +11083,7 @@
             <a:avLst/>
           </a:prstGeom>
           <a:solidFill>
-            <a:srgbClr val="EDEDF3"/>
+            <a:srgbClr val="1F2C56"/>
           </a:solidFill>
           <a:ln>
             <a:noFill/>
@@ -10735,57 +11113,14 @@
       </p:sp>
       <p:sp>
         <p:nvSpPr>
-          <p:cNvPr id="3" name="Rectangle 2"/>
-          <p:cNvSpPr/>
-          <p:nvPr/>
-        </p:nvSpPr>
-        <p:spPr>
-          <a:xfrm>
-            <a:off x="0" y="0"/>
-            <a:ext cx="12188952" cy="50292"/>
-          </a:xfrm>
-          <a:prstGeom prst="rect">
-            <a:avLst/>
-          </a:prstGeom>
-          <a:solidFill>
-            <a:srgbClr val="1F2C56"/>
-          </a:solidFill>
-          <a:ln>
-            <a:noFill/>
-          </a:ln>
-        </p:spPr>
-        <p:style>
-          <a:lnRef idx="1">
-            <a:schemeClr val="accent1"/>
-          </a:lnRef>
-          <a:fillRef idx="3">
-            <a:schemeClr val="accent1"/>
-          </a:fillRef>
-          <a:effectRef idx="2">
-            <a:schemeClr val="accent1"/>
-          </a:effectRef>
-          <a:fontRef idx="minor">
-            <a:schemeClr val="lt1"/>
-          </a:fontRef>
-        </p:style>
-        <p:txBody>
-          <a:bodyPr rtlCol="0" anchor="ctr"/>
-          <a:lstStyle/>
-          <a:p>
-            <a:pPr algn="ctr"/>
-          </a:p>
-        </p:txBody>
-      </p:sp>
-      <p:sp>
-        <p:nvSpPr>
-          <p:cNvPr id="4" name="TextBox 3"/>
+          <p:cNvPr id="3" name="TextBox 2"/>
           <p:cNvSpPr txBox="1"/>
           <p:nvPr/>
         </p:nvSpPr>
         <p:spPr>
           <a:xfrm>
-            <a:off x="685800" y="109728"/>
-            <a:ext cx="10817352" cy="228600"/>
+            <a:off x="685800" y="2377440"/>
+            <a:ext cx="10817352" cy="365760"/>
           </a:xfrm>
           <a:prstGeom prst="rect">
             <a:avLst/>
@@ -10800,70 +11135,27 @@
           <a:p>
             <a:pPr algn="l"/>
             <a:r>
-              <a:rPr sz="750">
-                <a:solidFill>
-                  <a:srgbClr val="78808C"/>
+              <a:rPr sz="1200">
+                <a:solidFill>
+                  <a:srgbClr val="D9C089"/>
                 </a:solidFill>
                 <a:latin typeface="Consolas"/>
               </a:rPr>
-              <a:t>TL07  ·  INHALT</a:t>
-            </a:r>
-          </a:p>
-        </p:txBody>
-      </p:sp>
-      <p:sp>
-        <p:nvSpPr>
-          <p:cNvPr id="5" name="Rectangle 4"/>
+              <a:t>ABSCHLUSS</a:t>
+            </a:r>
+          </a:p>
+        </p:txBody>
+      </p:sp>
+      <p:sp>
+        <p:nvSpPr>
+          <p:cNvPr id="4" name="Rectangle 3"/>
           <p:cNvSpPr/>
           <p:nvPr/>
         </p:nvSpPr>
         <p:spPr>
           <a:xfrm>
-            <a:off x="0" y="1234440"/>
-            <a:ext cx="12188952" cy="12700"/>
-          </a:xfrm>
-          <a:prstGeom prst="rect">
-            <a:avLst/>
-          </a:prstGeom>
-          <a:solidFill>
-            <a:srgbClr val="D8DFE4"/>
-          </a:solidFill>
-          <a:ln>
-            <a:noFill/>
-          </a:ln>
-        </p:spPr>
-        <p:style>
-          <a:lnRef idx="1">
-            <a:schemeClr val="accent1"/>
-          </a:lnRef>
-          <a:fillRef idx="3">
-            <a:schemeClr val="accent1"/>
-          </a:fillRef>
-          <a:effectRef idx="2">
-            <a:schemeClr val="accent1"/>
-          </a:effectRef>
-          <a:fontRef idx="minor">
-            <a:schemeClr val="lt1"/>
-          </a:fontRef>
-        </p:style>
-        <p:txBody>
-          <a:bodyPr rtlCol="0" anchor="ctr"/>
-          <a:lstStyle/>
-          <a:p>
-            <a:pPr algn="ctr"/>
-          </a:p>
-        </p:txBody>
-      </p:sp>
-      <p:sp>
-        <p:nvSpPr>
-          <p:cNvPr id="6" name="Rectangle 5"/>
-          <p:cNvSpPr/>
-          <p:nvPr/>
-        </p:nvSpPr>
-        <p:spPr>
-          <a:xfrm>
-            <a:off x="685800" y="502920"/>
-            <a:ext cx="36576" cy="658368"/>
+            <a:off x="685800" y="2788920"/>
+            <a:ext cx="548640" cy="38100"/>
           </a:xfrm>
           <a:prstGeom prst="rect">
             <a:avLst/>
@@ -10899,14 +11191,14 @@
       </p:sp>
       <p:sp>
         <p:nvSpPr>
-          <p:cNvPr id="7" name="TextBox 6"/>
+          <p:cNvPr id="5" name="TextBox 4"/>
           <p:cNvSpPr txBox="1"/>
           <p:nvPr/>
         </p:nvSpPr>
         <p:spPr>
           <a:xfrm>
-            <a:off x="813816" y="502920"/>
-            <a:ext cx="10634472" cy="685800"/>
+            <a:off x="685800" y="3017520"/>
+            <a:ext cx="10817352" cy="1463040"/>
           </a:xfrm>
           <a:prstGeom prst="rect">
             <a:avLst/>
@@ -10921,27 +11213,27 @@
           <a:p>
             <a:pPr algn="l"/>
             <a:r>
-              <a:rPr sz="2400" b="1" i="0">
-                <a:solidFill>
-                  <a:srgbClr val="1F2C56"/>
+              <a:rPr sz="4000" b="1" i="0">
+                <a:solidFill>
+                  <a:srgbClr val="FFFFFF"/>
                 </a:solidFill>
                 <a:latin typeface="Arial"/>
               </a:rPr>
-              <a:t>Drei Transferaufgaben für die nächsten vier Wochen</a:t>
-            </a:r>
-          </a:p>
-        </p:txBody>
-      </p:sp>
-      <p:sp>
-        <p:nvSpPr>
-          <p:cNvPr id="8" name="TextBox 7"/>
+              <a:t>Transfer &amp; Haltung</a:t>
+            </a:r>
+          </a:p>
+        </p:txBody>
+      </p:sp>
+      <p:sp>
+        <p:nvSpPr>
+          <p:cNvPr id="6" name="TextBox 5"/>
           <p:cNvSpPr txBox="1"/>
           <p:nvPr/>
         </p:nvSpPr>
         <p:spPr>
           <a:xfrm>
-            <a:off x="685800" y="1417320"/>
-            <a:ext cx="10817352" cy="4892040"/>
+            <a:off x="685800" y="4480560"/>
+            <a:ext cx="8653881" cy="1280160"/>
           </a:xfrm>
           <a:prstGeom prst="rect">
             <a:avLst/>
@@ -10949,122 +11241,34 @@
           <a:noFill/>
         </p:spPr>
         <p:txBody>
-          <a:bodyPr wrap="square" anchor="ctr">
+          <a:bodyPr wrap="square">
             <a:spAutoFit/>
           </a:bodyPr>
           <a:lstStyle/>
           <a:p>
-            <a:pPr marL="190500" indent="-190500">
-              <a:spcBef>
-                <a:spcPts val="400"/>
-              </a:spcBef>
-              <a:spcAft>
-                <a:spcPts val="200"/>
-              </a:spcAft>
-            </a:pPr>
-            <a:r>
-              <a:rPr sz="1300">
-                <a:solidFill>
-                  <a:srgbClr val="3D5466"/>
+            <a:pPr algn="l"/>
+            <a:r>
+              <a:rPr sz="1600" b="0" i="0">
+                <a:solidFill>
+                  <a:srgbClr val="C8D2E6"/>
                 </a:solidFill>
                 <a:latin typeface="Arial"/>
               </a:rPr>
-              <a:t>▸  1: Drei GROW-Momente im Alltag – dokumentiert, nicht formell.</a:t>
-            </a:r>
-          </a:p>
-          <a:p>
-            <a:pPr marL="190500" indent="-190500">
-              <a:spcBef>
-                <a:spcPts val="400"/>
-              </a:spcBef>
-              <a:spcAft>
-                <a:spcPts val="200"/>
-              </a:spcAft>
-            </a:pPr>
-            <a:r>
-              <a:rPr sz="1300">
-                <a:solidFill>
-                  <a:srgbClr val="3D5466"/>
-                </a:solidFill>
-                <a:latin typeface="Arial"/>
-              </a:rPr>
-              <a:t>▸  2: Situations-Diagnose bei jeder Berater-Anfrage eine Woche lang.</a:t>
-            </a:r>
-          </a:p>
-          <a:p>
-            <a:pPr marL="190500" indent="-190500">
-              <a:spcBef>
-                <a:spcPts val="400"/>
-              </a:spcBef>
-              <a:spcAft>
-                <a:spcPts val="200"/>
-              </a:spcAft>
-            </a:pPr>
-            <a:r>
-              <a:rPr sz="1300">
-                <a:solidFill>
-                  <a:srgbClr val="3D5466"/>
-                </a:solidFill>
-                <a:latin typeface="Arial"/>
-              </a:rPr>
-              <a:t>▸  3: AB-2-Konzept nach zwei Wochen revidieren – mit echten Erfahrungen.</a:t>
-            </a:r>
-          </a:p>
-        </p:txBody>
-      </p:sp>
-      <p:sp>
-        <p:nvSpPr>
-          <p:cNvPr id="9" name="Rectangle 8"/>
-          <p:cNvSpPr/>
-          <p:nvPr/>
-        </p:nvSpPr>
-        <p:spPr>
-          <a:xfrm>
-            <a:off x="0" y="6510528"/>
-            <a:ext cx="12188952" cy="347472"/>
-          </a:xfrm>
-          <a:prstGeom prst="rect">
-            <a:avLst/>
-          </a:prstGeom>
-          <a:solidFill>
-            <a:srgbClr val="0A1937"/>
-          </a:solidFill>
-          <a:ln>
-            <a:noFill/>
-          </a:ln>
-        </p:spPr>
-        <p:style>
-          <a:lnRef idx="1">
-            <a:schemeClr val="accent1"/>
-          </a:lnRef>
-          <a:fillRef idx="3">
-            <a:schemeClr val="accent1"/>
-          </a:fillRef>
-          <a:effectRef idx="2">
-            <a:schemeClr val="accent1"/>
-          </a:effectRef>
-          <a:fontRef idx="minor">
-            <a:schemeClr val="lt1"/>
-          </a:fontRef>
-        </p:style>
-        <p:txBody>
-          <a:bodyPr rtlCol="0" anchor="ctr"/>
-          <a:lstStyle/>
-          <a:p>
-            <a:pPr algn="ctr"/>
-          </a:p>
-        </p:txBody>
-      </p:sp>
-      <p:sp>
-        <p:nvSpPr>
-          <p:cNvPr id="10" name="TextBox 9"/>
+              <a:t>Drei Aufgaben für vier Wochen – Greenleaf-Test – Brücke TL09</a:t>
+            </a:r>
+          </a:p>
+        </p:txBody>
+      </p:sp>
+      <p:sp>
+        <p:nvSpPr>
+          <p:cNvPr id="7" name="TextBox 6"/>
           <p:cNvSpPr txBox="1"/>
           <p:nvPr/>
         </p:nvSpPr>
         <p:spPr>
           <a:xfrm>
-            <a:off x="685800" y="6583680"/>
-            <a:ext cx="6490411" cy="256032"/>
+            <a:off x="685800" y="6355080"/>
+            <a:ext cx="10817352" cy="274320"/>
           </a:xfrm>
           <a:prstGeom prst="rect">
             <a:avLst/>
@@ -11081,7 +11285,7 @@
             <a:r>
               <a:rPr sz="700">
                 <a:solidFill>
-                  <a:srgbClr val="A0B4D2"/>
+                  <a:srgbClr val="8CA0C3"/>
                 </a:solidFill>
                 <a:latin typeface="Consolas"/>
               </a:rPr>
@@ -11099,6 +11303,424 @@
 </file>
 
 <file path=ppt/slides/slide25.xml><?xml version="1.0" encoding="utf-8"?>
+<p:sld xmlns:a="http://schemas.openxmlformats.org/drawingml/2006/main" xmlns:p="http://schemas.openxmlformats.org/presentationml/2006/main" xmlns:r="http://schemas.openxmlformats.org/officeDocument/2006/relationships">
+  <p:cSld>
+    <p:spTree>
+      <p:nvGrpSpPr>
+        <p:cNvPr id="1" name=""/>
+        <p:cNvGrpSpPr/>
+        <p:nvPr/>
+      </p:nvGrpSpPr>
+      <p:grpSpPr/>
+      <p:sp>
+        <p:nvSpPr>
+          <p:cNvPr id="2" name="Rectangle 1"/>
+          <p:cNvSpPr/>
+          <p:nvPr/>
+        </p:nvSpPr>
+        <p:spPr>
+          <a:xfrm>
+            <a:off x="0" y="0"/>
+            <a:ext cx="12188952" cy="6858000"/>
+          </a:xfrm>
+          <a:prstGeom prst="rect">
+            <a:avLst/>
+          </a:prstGeom>
+          <a:solidFill>
+            <a:srgbClr val="EDEDF3"/>
+          </a:solidFill>
+          <a:ln>
+            <a:noFill/>
+          </a:ln>
+        </p:spPr>
+        <p:style>
+          <a:lnRef idx="1">
+            <a:schemeClr val="accent1"/>
+          </a:lnRef>
+          <a:fillRef idx="3">
+            <a:schemeClr val="accent1"/>
+          </a:fillRef>
+          <a:effectRef idx="2">
+            <a:schemeClr val="accent1"/>
+          </a:effectRef>
+          <a:fontRef idx="minor">
+            <a:schemeClr val="lt1"/>
+          </a:fontRef>
+        </p:style>
+        <p:txBody>
+          <a:bodyPr rtlCol="0" anchor="ctr"/>
+          <a:lstStyle/>
+          <a:p>
+            <a:pPr algn="ctr"/>
+          </a:p>
+        </p:txBody>
+      </p:sp>
+      <p:sp>
+        <p:nvSpPr>
+          <p:cNvPr id="3" name="Rectangle 2"/>
+          <p:cNvSpPr/>
+          <p:nvPr/>
+        </p:nvSpPr>
+        <p:spPr>
+          <a:xfrm>
+            <a:off x="0" y="0"/>
+            <a:ext cx="12188952" cy="50292"/>
+          </a:xfrm>
+          <a:prstGeom prst="rect">
+            <a:avLst/>
+          </a:prstGeom>
+          <a:solidFill>
+            <a:srgbClr val="1F2C56"/>
+          </a:solidFill>
+          <a:ln>
+            <a:noFill/>
+          </a:ln>
+        </p:spPr>
+        <p:style>
+          <a:lnRef idx="1">
+            <a:schemeClr val="accent1"/>
+          </a:lnRef>
+          <a:fillRef idx="3">
+            <a:schemeClr val="accent1"/>
+          </a:fillRef>
+          <a:effectRef idx="2">
+            <a:schemeClr val="accent1"/>
+          </a:effectRef>
+          <a:fontRef idx="minor">
+            <a:schemeClr val="lt1"/>
+          </a:fontRef>
+        </p:style>
+        <p:txBody>
+          <a:bodyPr rtlCol="0" anchor="ctr"/>
+          <a:lstStyle/>
+          <a:p>
+            <a:pPr algn="ctr"/>
+          </a:p>
+        </p:txBody>
+      </p:sp>
+      <p:sp>
+        <p:nvSpPr>
+          <p:cNvPr id="4" name="TextBox 3"/>
+          <p:cNvSpPr txBox="1"/>
+          <p:nvPr/>
+        </p:nvSpPr>
+        <p:spPr>
+          <a:xfrm>
+            <a:off x="685800" y="109728"/>
+            <a:ext cx="10817352" cy="228600"/>
+          </a:xfrm>
+          <a:prstGeom prst="rect">
+            <a:avLst/>
+          </a:prstGeom>
+          <a:noFill/>
+        </p:spPr>
+        <p:txBody>
+          <a:bodyPr wrap="none">
+            <a:spAutoFit/>
+          </a:bodyPr>
+          <a:lstStyle/>
+          <a:p>
+            <a:pPr algn="l"/>
+            <a:r>
+              <a:rPr sz="750">
+                <a:solidFill>
+                  <a:srgbClr val="78808C"/>
+                </a:solidFill>
+                <a:latin typeface="Consolas"/>
+              </a:rPr>
+              <a:t>TL07  ·  INHALT</a:t>
+            </a:r>
+          </a:p>
+        </p:txBody>
+      </p:sp>
+      <p:sp>
+        <p:nvSpPr>
+          <p:cNvPr id="5" name="Rectangle 4"/>
+          <p:cNvSpPr/>
+          <p:nvPr/>
+        </p:nvSpPr>
+        <p:spPr>
+          <a:xfrm>
+            <a:off x="0" y="1234440"/>
+            <a:ext cx="12188952" cy="12700"/>
+          </a:xfrm>
+          <a:prstGeom prst="rect">
+            <a:avLst/>
+          </a:prstGeom>
+          <a:solidFill>
+            <a:srgbClr val="D8DFE4"/>
+          </a:solidFill>
+          <a:ln>
+            <a:noFill/>
+          </a:ln>
+        </p:spPr>
+        <p:style>
+          <a:lnRef idx="1">
+            <a:schemeClr val="accent1"/>
+          </a:lnRef>
+          <a:fillRef idx="3">
+            <a:schemeClr val="accent1"/>
+          </a:fillRef>
+          <a:effectRef idx="2">
+            <a:schemeClr val="accent1"/>
+          </a:effectRef>
+          <a:fontRef idx="minor">
+            <a:schemeClr val="lt1"/>
+          </a:fontRef>
+        </p:style>
+        <p:txBody>
+          <a:bodyPr rtlCol="0" anchor="ctr"/>
+          <a:lstStyle/>
+          <a:p>
+            <a:pPr algn="ctr"/>
+          </a:p>
+        </p:txBody>
+      </p:sp>
+      <p:sp>
+        <p:nvSpPr>
+          <p:cNvPr id="6" name="Rectangle 5"/>
+          <p:cNvSpPr/>
+          <p:nvPr/>
+        </p:nvSpPr>
+        <p:spPr>
+          <a:xfrm>
+            <a:off x="685800" y="502920"/>
+            <a:ext cx="36576" cy="658368"/>
+          </a:xfrm>
+          <a:prstGeom prst="rect">
+            <a:avLst/>
+          </a:prstGeom>
+          <a:solidFill>
+            <a:srgbClr val="D9C089"/>
+          </a:solidFill>
+          <a:ln>
+            <a:noFill/>
+          </a:ln>
+        </p:spPr>
+        <p:style>
+          <a:lnRef idx="1">
+            <a:schemeClr val="accent1"/>
+          </a:lnRef>
+          <a:fillRef idx="3">
+            <a:schemeClr val="accent1"/>
+          </a:fillRef>
+          <a:effectRef idx="2">
+            <a:schemeClr val="accent1"/>
+          </a:effectRef>
+          <a:fontRef idx="minor">
+            <a:schemeClr val="lt1"/>
+          </a:fontRef>
+        </p:style>
+        <p:txBody>
+          <a:bodyPr rtlCol="0" anchor="ctr"/>
+          <a:lstStyle/>
+          <a:p>
+            <a:pPr algn="ctr"/>
+          </a:p>
+        </p:txBody>
+      </p:sp>
+      <p:sp>
+        <p:nvSpPr>
+          <p:cNvPr id="7" name="TextBox 6"/>
+          <p:cNvSpPr txBox="1"/>
+          <p:nvPr/>
+        </p:nvSpPr>
+        <p:spPr>
+          <a:xfrm>
+            <a:off x="813816" y="502920"/>
+            <a:ext cx="10634472" cy="685800"/>
+          </a:xfrm>
+          <a:prstGeom prst="rect">
+            <a:avLst/>
+          </a:prstGeom>
+          <a:noFill/>
+        </p:spPr>
+        <p:txBody>
+          <a:bodyPr wrap="square">
+            <a:spAutoFit/>
+          </a:bodyPr>
+          <a:lstStyle/>
+          <a:p>
+            <a:pPr algn="l"/>
+            <a:r>
+              <a:rPr sz="2400" b="1" i="0">
+                <a:solidFill>
+                  <a:srgbClr val="1F2C56"/>
+                </a:solidFill>
+                <a:latin typeface="Arial"/>
+              </a:rPr>
+              <a:t>Drei Transferaufgaben für die nächsten vier Wochen</a:t>
+            </a:r>
+          </a:p>
+        </p:txBody>
+      </p:sp>
+      <p:sp>
+        <p:nvSpPr>
+          <p:cNvPr id="8" name="TextBox 7"/>
+          <p:cNvSpPr txBox="1"/>
+          <p:nvPr/>
+        </p:nvSpPr>
+        <p:spPr>
+          <a:xfrm>
+            <a:off x="685800" y="1417320"/>
+            <a:ext cx="10817352" cy="4892040"/>
+          </a:xfrm>
+          <a:prstGeom prst="rect">
+            <a:avLst/>
+          </a:prstGeom>
+          <a:noFill/>
+        </p:spPr>
+        <p:txBody>
+          <a:bodyPr wrap="square" anchor="ctr">
+            <a:spAutoFit/>
+          </a:bodyPr>
+          <a:lstStyle/>
+          <a:p>
+            <a:pPr marL="190500" indent="-190500">
+              <a:spcBef>
+                <a:spcPts val="400"/>
+              </a:spcBef>
+              <a:spcAft>
+                <a:spcPts val="200"/>
+              </a:spcAft>
+            </a:pPr>
+            <a:r>
+              <a:rPr sz="1300">
+                <a:solidFill>
+                  <a:srgbClr val="3D5466"/>
+                </a:solidFill>
+                <a:latin typeface="Arial"/>
+              </a:rPr>
+              <a:t>▸  1: Drei GROW-Momente im Alltag – dokumentiert, nicht formell.</a:t>
+            </a:r>
+          </a:p>
+          <a:p>
+            <a:pPr marL="190500" indent="-190500">
+              <a:spcBef>
+                <a:spcPts val="400"/>
+              </a:spcBef>
+              <a:spcAft>
+                <a:spcPts val="200"/>
+              </a:spcAft>
+            </a:pPr>
+            <a:r>
+              <a:rPr sz="1300">
+                <a:solidFill>
+                  <a:srgbClr val="3D5466"/>
+                </a:solidFill>
+                <a:latin typeface="Arial"/>
+              </a:rPr>
+              <a:t>▸  2: Situations-Diagnose bei jeder Berater-Anfrage eine Woche lang.</a:t>
+            </a:r>
+          </a:p>
+          <a:p>
+            <a:pPr marL="190500" indent="-190500">
+              <a:spcBef>
+                <a:spcPts val="400"/>
+              </a:spcBef>
+              <a:spcAft>
+                <a:spcPts val="200"/>
+              </a:spcAft>
+            </a:pPr>
+            <a:r>
+              <a:rPr sz="1300">
+                <a:solidFill>
+                  <a:srgbClr val="3D5466"/>
+                </a:solidFill>
+                <a:latin typeface="Arial"/>
+              </a:rPr>
+              <a:t>▸  3: AB-2-Konzept nach zwei Wochen revidieren – mit echten Erfahrungen.</a:t>
+            </a:r>
+          </a:p>
+        </p:txBody>
+      </p:sp>
+      <p:sp>
+        <p:nvSpPr>
+          <p:cNvPr id="9" name="Rectangle 8"/>
+          <p:cNvSpPr/>
+          <p:nvPr/>
+        </p:nvSpPr>
+        <p:spPr>
+          <a:xfrm>
+            <a:off x="0" y="6510528"/>
+            <a:ext cx="12188952" cy="347472"/>
+          </a:xfrm>
+          <a:prstGeom prst="rect">
+            <a:avLst/>
+          </a:prstGeom>
+          <a:solidFill>
+            <a:srgbClr val="0A1937"/>
+          </a:solidFill>
+          <a:ln>
+            <a:noFill/>
+          </a:ln>
+        </p:spPr>
+        <p:style>
+          <a:lnRef idx="1">
+            <a:schemeClr val="accent1"/>
+          </a:lnRef>
+          <a:fillRef idx="3">
+            <a:schemeClr val="accent1"/>
+          </a:fillRef>
+          <a:effectRef idx="2">
+            <a:schemeClr val="accent1"/>
+          </a:effectRef>
+          <a:fontRef idx="minor">
+            <a:schemeClr val="lt1"/>
+          </a:fontRef>
+        </p:style>
+        <p:txBody>
+          <a:bodyPr rtlCol="0" anchor="ctr"/>
+          <a:lstStyle/>
+          <a:p>
+            <a:pPr algn="ctr"/>
+          </a:p>
+        </p:txBody>
+      </p:sp>
+      <p:sp>
+        <p:nvSpPr>
+          <p:cNvPr id="10" name="TextBox 9"/>
+          <p:cNvSpPr txBox="1"/>
+          <p:nvPr/>
+        </p:nvSpPr>
+        <p:spPr>
+          <a:xfrm>
+            <a:off x="685800" y="6583680"/>
+            <a:ext cx="6490411" cy="256032"/>
+          </a:xfrm>
+          <a:prstGeom prst="rect">
+            <a:avLst/>
+          </a:prstGeom>
+          <a:noFill/>
+        </p:spPr>
+        <p:txBody>
+          <a:bodyPr wrap="none">
+            <a:spAutoFit/>
+          </a:bodyPr>
+          <a:lstStyle/>
+          <a:p>
+            <a:pPr algn="l"/>
+            <a:r>
+              <a:rPr sz="700">
+                <a:solidFill>
+                  <a:srgbClr val="A0B4D2"/>
+                </a:solidFill>
+                <a:latin typeface="Consolas"/>
+              </a:rPr>
+              <a:t>FKB Campus  ·  TL07</a:t>
+            </a:r>
+          </a:p>
+        </p:txBody>
+      </p:sp>
+    </p:spTree>
+  </p:cSld>
+  <p:clrMapOvr>
+    <a:masterClrMapping/>
+  </p:clrMapOvr>
+</p:sld>
+</file>
+
+<file path=ppt/slides/slide26.xml><?xml version="1.0" encoding="utf-8"?>
 <p:sld xmlns:a="http://schemas.openxmlformats.org/drawingml/2006/main" xmlns:p="http://schemas.openxmlformats.org/presentationml/2006/main" xmlns:r="http://schemas.openxmlformats.org/officeDocument/2006/relationships">
   <p:cSld>
     <p:spTree>
